--- a/public/lessons/year-6-maths/autumn/week-6/read-and-structure-expressions/teaching-powerpoint-v1.pptx
+++ b/public/lessons/year-6-maths/autumn/week-6/read-and-structure-expressions/teaching-powerpoint-v1.pptx
@@ -2,24 +2,24 @@
 <file path=ppt/presentation.xml><?xml version="1.0" encoding="utf-8"?>
 <p:presentation xmlns:p="http://schemas.openxmlformats.org/presentationml/2006/main">
   <p:sldMasterIdLst>
-    <p:sldMasterId xmlns:r="http://schemas.openxmlformats.org/officeDocument/2006/relationships" id="2147483648" r:id="R226a36183cfe4ab8"/>
+    <p:sldMasterId xmlns:r="http://schemas.openxmlformats.org/officeDocument/2006/relationships" id="2147483648" r:id="R9405e36877044f58"/>
   </p:sldMasterIdLst>
   <p:notesMasterIdLst>
-    <p:notesMasterId xmlns:r="http://schemas.openxmlformats.org/officeDocument/2006/relationships" r:id="R0cb71da985c248bc"/>
+    <p:notesMasterId xmlns:r="http://schemas.openxmlformats.org/officeDocument/2006/relationships" r:id="Rabee200e8a0e4dad"/>
   </p:notesMasterIdLst>
   <p:sldIdLst>
-    <p:sldId xmlns:r="http://schemas.openxmlformats.org/officeDocument/2006/relationships" id="256" r:id="R10bb513a19f746fe"/>
-    <p:sldId xmlns:r="http://schemas.openxmlformats.org/officeDocument/2006/relationships" id="257" r:id="R0fb31acd760b4a96"/>
-    <p:sldId xmlns:r="http://schemas.openxmlformats.org/officeDocument/2006/relationships" id="258" r:id="R3db025f59c064dac"/>
-    <p:sldId xmlns:r="http://schemas.openxmlformats.org/officeDocument/2006/relationships" id="259" r:id="Re0317da8f0bd45ec"/>
-    <p:sldId xmlns:r="http://schemas.openxmlformats.org/officeDocument/2006/relationships" id="260" r:id="R2e7684607b214659"/>
-    <p:sldId xmlns:r="http://schemas.openxmlformats.org/officeDocument/2006/relationships" id="261" r:id="R7bd58ac0a8cd49d4"/>
-    <p:sldId xmlns:r="http://schemas.openxmlformats.org/officeDocument/2006/relationships" id="262" r:id="Rf53ccab6365147aa"/>
-    <p:sldId xmlns:r="http://schemas.openxmlformats.org/officeDocument/2006/relationships" id="263" r:id="R1724ebcc05414765"/>
-    <p:sldId xmlns:r="http://schemas.openxmlformats.org/officeDocument/2006/relationships" id="264" r:id="R422f2d9fd1b84ab3"/>
-    <p:sldId xmlns:r="http://schemas.openxmlformats.org/officeDocument/2006/relationships" id="265" r:id="R14577373770140d1"/>
-    <p:sldId xmlns:r="http://schemas.openxmlformats.org/officeDocument/2006/relationships" id="266" r:id="Rf727eb6aeb074b89"/>
-    <p:sldId xmlns:r="http://schemas.openxmlformats.org/officeDocument/2006/relationships" id="267" r:id="R9cde32a8be1b41ea"/>
+    <p:sldId xmlns:r="http://schemas.openxmlformats.org/officeDocument/2006/relationships" id="256" r:id="R58ae5dfa05ac4df1"/>
+    <p:sldId xmlns:r="http://schemas.openxmlformats.org/officeDocument/2006/relationships" id="257" r:id="Re4c296a368834360"/>
+    <p:sldId xmlns:r="http://schemas.openxmlformats.org/officeDocument/2006/relationships" id="258" r:id="Rdf7e49e202f34174"/>
+    <p:sldId xmlns:r="http://schemas.openxmlformats.org/officeDocument/2006/relationships" id="259" r:id="R04eb12f2d21642a2"/>
+    <p:sldId xmlns:r="http://schemas.openxmlformats.org/officeDocument/2006/relationships" id="260" r:id="Ra2ab048c1d14421a"/>
+    <p:sldId xmlns:r="http://schemas.openxmlformats.org/officeDocument/2006/relationships" id="261" r:id="Re185940943064f32"/>
+    <p:sldId xmlns:r="http://schemas.openxmlformats.org/officeDocument/2006/relationships" id="262" r:id="R48f3a93ce9ee4a4c"/>
+    <p:sldId xmlns:r="http://schemas.openxmlformats.org/officeDocument/2006/relationships" id="263" r:id="Rb10c80b2f2e44b49"/>
+    <p:sldId xmlns:r="http://schemas.openxmlformats.org/officeDocument/2006/relationships" id="264" r:id="Ree855b5823c6479c"/>
+    <p:sldId xmlns:r="http://schemas.openxmlformats.org/officeDocument/2006/relationships" id="265" r:id="Rb28eb830347748d2"/>
+    <p:sldId xmlns:r="http://schemas.openxmlformats.org/officeDocument/2006/relationships" id="266" r:id="R4e2d472c68ae42c2"/>
+    <p:sldId xmlns:r="http://schemas.openxmlformats.org/officeDocument/2006/relationships" id="267" r:id="R1956e1b64c014141"/>
   </p:sldIdLst>
   <p:sldSz cx="12192000" cy="6858000"/>
   <p:notesSz cx="6858000" cy="9144000"/>
@@ -873,7 +873,7 @@
           <a:lstStyle xmlns:a="http://schemas.openxmlformats.org/drawingml/2006/main"/>
           <a:p xmlns:a="http://schemas.openxmlformats.org/drawingml/2006/main">
             <a:r>
-              <a:t>I do. Reveal the question, setup and each calculation stage one click at a time. Pupils watch before copying. Model answer: Multiply 6 by 5, then subtract the product from 48.</a:t>
+              <a:t>I do. Reveal the question, then reveal each mathematical change one click at a time. Point to the numbers and operation that changed before moving to the next line. Final answer: Multiply 6 by 5, then subtract the product from 48.</a:t>
             </a:r>
           </a:p>
         </p:txBody>
@@ -1291,7 +1291,7 @@
   </p:cSld>
   <p:clrMap bg1="lt1" tx1="dk1" bg2="lt2" tx2="dk2" accent1="accent1" accent2="accent2" accent3="accent3" accent4="accent4" accent5="accent5" accent6="accent6" hlink="hlink" folHlink="folHlink"/>
   <p:sldLayoutIdLst>
-    <p:sldLayoutId xmlns:r="http://schemas.openxmlformats.org/officeDocument/2006/relationships" id="2147483649" r:id="R53da358cf5894330"/>
+    <p:sldLayoutId xmlns:r="http://schemas.openxmlformats.org/officeDocument/2006/relationships" id="2147483649" r:id="R737605c2b6fd4ee0"/>
   </p:sldLayoutIdLst>
   <p:txStyles>
     <p:titleStyle>
@@ -1842,7 +1842,7 @@
           <p:cNvPr id="12" name="">
             <a:extLst xmlns:a="http://schemas.openxmlformats.org/drawingml/2006/main">
               <a:ext uri="{FF2B5EF4-FFF2-40B4-BE49-F238E27FC236}">
-                <a16:creationId xmlns:a16="http://schemas.microsoft.com/office/drawing/2014/main" id="{BC3BEBA3-2232-4EA7-8053-5CE5A0A75CD1}"/>
+                <a16:creationId xmlns:a16="http://schemas.microsoft.com/office/drawing/2014/main" id="{173470E6-3200-40EF-BD3C-8AE956BE6BEE}"/>
               </a:ext>
             </a:extLst>
           </p:cNvPr>
@@ -1874,7 +1874,7 @@
           <p:cNvPr id="2" name="">
             <a:extLst xmlns:a="http://schemas.openxmlformats.org/drawingml/2006/main">
               <a:ext uri="{FF2B5EF4-FFF2-40B4-BE49-F238E27FC236}">
-                <a16:creationId xmlns:a16="http://schemas.microsoft.com/office/drawing/2014/main" id="{DA4694EF-8C1C-410A-AC83-0889454DE4EE}"/>
+                <a16:creationId xmlns:a16="http://schemas.microsoft.com/office/drawing/2014/main" id="{B1204549-35FD-45DE-BBDF-F5036CF58B38}"/>
               </a:ext>
             </a:extLst>
           </p:cNvPr>
@@ -1931,7 +1931,7 @@
           <p:cNvPr id="3" name="">
             <a:extLst xmlns:a="http://schemas.openxmlformats.org/drawingml/2006/main">
               <a:ext uri="{FF2B5EF4-FFF2-40B4-BE49-F238E27FC236}">
-                <a16:creationId xmlns:a16="http://schemas.microsoft.com/office/drawing/2014/main" id="{42BD8479-0074-4A72-A5F1-66D13B40E754}"/>
+                <a16:creationId xmlns:a16="http://schemas.microsoft.com/office/drawing/2014/main" id="{D5433F9B-D622-4836-9C38-EC7B5C6CEB4A}"/>
               </a:ext>
             </a:extLst>
           </p:cNvPr>
@@ -1965,7 +1965,7 @@
           <p:cNvPr id="4" name="">
             <a:extLst xmlns:a="http://schemas.openxmlformats.org/drawingml/2006/main">
               <a:ext uri="{FF2B5EF4-FFF2-40B4-BE49-F238E27FC236}">
-                <a16:creationId xmlns:a16="http://schemas.microsoft.com/office/drawing/2014/main" id="{0F856864-A67F-4B9C-A5D3-B22D3A760A17}"/>
+                <a16:creationId xmlns:a16="http://schemas.microsoft.com/office/drawing/2014/main" id="{E08F3BC8-6253-4B2D-A3B4-E3D64E9C44B1}"/>
               </a:ext>
             </a:extLst>
           </p:cNvPr>
@@ -2022,7 +2022,7 @@
           <p:cNvPr id="5" name="">
             <a:extLst xmlns:a="http://schemas.openxmlformats.org/drawingml/2006/main">
               <a:ext uri="{FF2B5EF4-FFF2-40B4-BE49-F238E27FC236}">
-                <a16:creationId xmlns:a16="http://schemas.microsoft.com/office/drawing/2014/main" id="{49FDA917-1DF6-40F8-AD62-29E6C6BF4CE7}"/>
+                <a16:creationId xmlns:a16="http://schemas.microsoft.com/office/drawing/2014/main" id="{0A41602F-CA85-49BD-824B-69FD85640623}"/>
               </a:ext>
             </a:extLst>
           </p:cNvPr>
@@ -2079,7 +2079,7 @@
           <p:cNvPr id="6" name="">
             <a:extLst xmlns:a="http://schemas.openxmlformats.org/drawingml/2006/main">
               <a:ext uri="{FF2B5EF4-FFF2-40B4-BE49-F238E27FC236}">
-                <a16:creationId xmlns:a16="http://schemas.microsoft.com/office/drawing/2014/main" id="{1072B2CE-E910-4BCE-B29A-0825FFACE883}"/>
+                <a16:creationId xmlns:a16="http://schemas.microsoft.com/office/drawing/2014/main" id="{AFBFF245-ED18-4327-83F5-F5AAE67C353C}"/>
               </a:ext>
             </a:extLst>
           </p:cNvPr>
@@ -2113,7 +2113,7 @@
           <p:cNvPr id="7" name="">
             <a:extLst xmlns:a="http://schemas.openxmlformats.org/drawingml/2006/main">
               <a:ext uri="{FF2B5EF4-FFF2-40B4-BE49-F238E27FC236}">
-                <a16:creationId xmlns:a16="http://schemas.microsoft.com/office/drawing/2014/main" id="{CA33DFBC-C0FD-41B6-A990-074412F8C824}"/>
+                <a16:creationId xmlns:a16="http://schemas.microsoft.com/office/drawing/2014/main" id="{2C5332C9-62E0-4D0E-907D-3E552443A495}"/>
               </a:ext>
             </a:extLst>
           </p:cNvPr>
@@ -2170,7 +2170,7 @@
           <p:cNvPr id="8" name="">
             <a:extLst xmlns:a="http://schemas.openxmlformats.org/drawingml/2006/main">
               <a:ext uri="{FF2B5EF4-FFF2-40B4-BE49-F238E27FC236}">
-                <a16:creationId xmlns:a16="http://schemas.microsoft.com/office/drawing/2014/main" id="{E330D33A-8D45-438D-8B4E-8AFEBF05D12D}"/>
+                <a16:creationId xmlns:a16="http://schemas.microsoft.com/office/drawing/2014/main" id="{2989106A-81AD-48F0-B15D-7EE60C3139F2}"/>
               </a:ext>
             </a:extLst>
           </p:cNvPr>
@@ -2227,7 +2227,7 @@
           <p:cNvPr id="9" name="">
             <a:extLst xmlns:a="http://schemas.openxmlformats.org/drawingml/2006/main">
               <a:ext uri="{FF2B5EF4-FFF2-40B4-BE49-F238E27FC236}">
-                <a16:creationId xmlns:a16="http://schemas.microsoft.com/office/drawing/2014/main" id="{5B77FAB6-6327-49BE-B5EE-E756EE56BF4B}"/>
+                <a16:creationId xmlns:a16="http://schemas.microsoft.com/office/drawing/2014/main" id="{E506C697-7FA9-4EBC-84F0-50A0AEB46077}"/>
               </a:ext>
             </a:extLst>
           </p:cNvPr>
@@ -2284,7 +2284,7 @@
           <p:cNvPr id="10" name="">
             <a:extLst xmlns:a="http://schemas.openxmlformats.org/drawingml/2006/main">
               <a:ext uri="{FF2B5EF4-FFF2-40B4-BE49-F238E27FC236}">
-                <a16:creationId xmlns:a16="http://schemas.microsoft.com/office/drawing/2014/main" id="{FD09ADC6-3EB2-4F5A-B443-476DAF7AB8A8}"/>
+                <a16:creationId xmlns:a16="http://schemas.microsoft.com/office/drawing/2014/main" id="{EA29AD2E-9A22-40FA-A249-BFE350CE9D5C}"/>
               </a:ext>
             </a:extLst>
           </p:cNvPr>
@@ -2341,7 +2341,7 @@
           <p:cNvPr id="11" name="">
             <a:extLst xmlns:a="http://schemas.openxmlformats.org/drawingml/2006/main">
               <a:ext uri="{FF2B5EF4-FFF2-40B4-BE49-F238E27FC236}">
-                <a16:creationId xmlns:a16="http://schemas.microsoft.com/office/drawing/2014/main" id="{1FEA2A0A-3BC2-4232-BC1A-82EEDBC71FE2}"/>
+                <a16:creationId xmlns:a16="http://schemas.microsoft.com/office/drawing/2014/main" id="{B5373939-17EA-481E-BB19-96A150D3539B}"/>
               </a:ext>
             </a:extLst>
           </p:cNvPr>
@@ -2396,7 +2396,7 @@
     </p:spTree>
     <p:extLst>
       <p:ext uri="{BB962C8B-B14F-4D97-AF65-F5344CB8AC3E}">
-        <p14:creationId xmlns:p14="http://schemas.microsoft.com/office/powerpoint/2010/main" val="2125844711"/>
+        <p14:creationId xmlns:p14="http://schemas.microsoft.com/office/powerpoint/2010/main" val="994968059"/>
       </p:ext>
     </p:extLst>
   </p:cSld>
@@ -2427,7 +2427,7 @@
           <p:cNvPr id="14" name="">
             <a:extLst xmlns:a="http://schemas.openxmlformats.org/drawingml/2006/main">
               <a:ext uri="{FF2B5EF4-FFF2-40B4-BE49-F238E27FC236}">
-                <a16:creationId xmlns:a16="http://schemas.microsoft.com/office/drawing/2014/main" id="{23F6E6EE-7A02-4811-AFFB-E11F2BFFEF80}"/>
+                <a16:creationId xmlns:a16="http://schemas.microsoft.com/office/drawing/2014/main" id="{18EC21FC-CF3D-45C0-B768-A381EA594E56}"/>
               </a:ext>
             </a:extLst>
           </p:cNvPr>
@@ -2459,7 +2459,7 @@
           <p:cNvPr id="2" name="">
             <a:extLst xmlns:a="http://schemas.openxmlformats.org/drawingml/2006/main">
               <a:ext uri="{FF2B5EF4-FFF2-40B4-BE49-F238E27FC236}">
-                <a16:creationId xmlns:a16="http://schemas.microsoft.com/office/drawing/2014/main" id="{2B74BED5-353B-410D-BA89-C5F17BEE266B}"/>
+                <a16:creationId xmlns:a16="http://schemas.microsoft.com/office/drawing/2014/main" id="{9D24C0CF-947C-42E0-991D-CD01D4AE9A10}"/>
               </a:ext>
             </a:extLst>
           </p:cNvPr>
@@ -2516,7 +2516,7 @@
           <p:cNvPr id="3" name="">
             <a:extLst xmlns:a="http://schemas.openxmlformats.org/drawingml/2006/main">
               <a:ext uri="{FF2B5EF4-FFF2-40B4-BE49-F238E27FC236}">
-                <a16:creationId xmlns:a16="http://schemas.microsoft.com/office/drawing/2014/main" id="{A5240E2F-CA6C-42A2-9F58-89BDBA8A30CB}"/>
+                <a16:creationId xmlns:a16="http://schemas.microsoft.com/office/drawing/2014/main" id="{CF64812C-57A7-4AA4-B940-020D97922C97}"/>
               </a:ext>
             </a:extLst>
           </p:cNvPr>
@@ -2548,7 +2548,7 @@
           <p:cNvPr id="4" name="">
             <a:extLst xmlns:a="http://schemas.openxmlformats.org/drawingml/2006/main">
               <a:ext uri="{FF2B5EF4-FFF2-40B4-BE49-F238E27FC236}">
-                <a16:creationId xmlns:a16="http://schemas.microsoft.com/office/drawing/2014/main" id="{E6512B76-63A0-4A93-B42D-ED2EF935196D}"/>
+                <a16:creationId xmlns:a16="http://schemas.microsoft.com/office/drawing/2014/main" id="{A8427E76-768E-4509-A0BD-3ED58807D13F}"/>
               </a:ext>
             </a:extLst>
           </p:cNvPr>
@@ -2605,7 +2605,7 @@
           <p:cNvPr id="5" name="">
             <a:extLst xmlns:a="http://schemas.openxmlformats.org/drawingml/2006/main">
               <a:ext uri="{FF2B5EF4-FFF2-40B4-BE49-F238E27FC236}">
-                <a16:creationId xmlns:a16="http://schemas.microsoft.com/office/drawing/2014/main" id="{384F3CB2-65E9-46D9-A2C8-DE1D1007D4D7}"/>
+                <a16:creationId xmlns:a16="http://schemas.microsoft.com/office/drawing/2014/main" id="{67714840-B268-4CB4-A9F3-43431C9AE23D}"/>
               </a:ext>
             </a:extLst>
           </p:cNvPr>
@@ -2662,7 +2662,7 @@
           <p:cNvPr id="6" name="">
             <a:extLst xmlns:a="http://schemas.openxmlformats.org/drawingml/2006/main">
               <a:ext uri="{FF2B5EF4-FFF2-40B4-BE49-F238E27FC236}">
-                <a16:creationId xmlns:a16="http://schemas.microsoft.com/office/drawing/2014/main" id="{D9FCF786-2E91-4CC8-B390-554717439423}"/>
+                <a16:creationId xmlns:a16="http://schemas.microsoft.com/office/drawing/2014/main" id="{4CD081EA-23C9-41CE-9E5A-7DD51E74A5CB}"/>
               </a:ext>
             </a:extLst>
           </p:cNvPr>
@@ -2719,7 +2719,7 @@
           <p:cNvPr id="7" name="">
             <a:extLst xmlns:a="http://schemas.openxmlformats.org/drawingml/2006/main">
               <a:ext uri="{FF2B5EF4-FFF2-40B4-BE49-F238E27FC236}">
-                <a16:creationId xmlns:a16="http://schemas.microsoft.com/office/drawing/2014/main" id="{2AFFA65E-2C56-4218-9EAB-DD848CA0D565}"/>
+                <a16:creationId xmlns:a16="http://schemas.microsoft.com/office/drawing/2014/main" id="{FE136AE8-C34D-4C75-9646-0CE9172ABD5D}"/>
               </a:ext>
             </a:extLst>
           </p:cNvPr>
@@ -2751,7 +2751,7 @@
           <p:cNvPr id="8" name="">
             <a:extLst xmlns:a="http://schemas.openxmlformats.org/drawingml/2006/main">
               <a:ext uri="{FF2B5EF4-FFF2-40B4-BE49-F238E27FC236}">
-                <a16:creationId xmlns:a16="http://schemas.microsoft.com/office/drawing/2014/main" id="{5161FD8D-5CA7-4BE8-B6D1-4DB44E55E151}"/>
+                <a16:creationId xmlns:a16="http://schemas.microsoft.com/office/drawing/2014/main" id="{1A513D81-629D-4AAF-BD5A-E77A30DB3414}"/>
               </a:ext>
             </a:extLst>
           </p:cNvPr>
@@ -2808,7 +2808,7 @@
           <p:cNvPr id="9" name="">
             <a:extLst xmlns:a="http://schemas.openxmlformats.org/drawingml/2006/main">
               <a:ext uri="{FF2B5EF4-FFF2-40B4-BE49-F238E27FC236}">
-                <a16:creationId xmlns:a16="http://schemas.microsoft.com/office/drawing/2014/main" id="{D7970CA5-6654-4D7E-994F-62BB266FAF98}"/>
+                <a16:creationId xmlns:a16="http://schemas.microsoft.com/office/drawing/2014/main" id="{26E04C15-F77A-4CF8-8594-11E8411A5B4A}"/>
               </a:ext>
             </a:extLst>
           </p:cNvPr>
@@ -2865,7 +2865,7 @@
           <p:cNvPr id="10" name="">
             <a:extLst xmlns:a="http://schemas.openxmlformats.org/drawingml/2006/main">
               <a:ext uri="{FF2B5EF4-FFF2-40B4-BE49-F238E27FC236}">
-                <a16:creationId xmlns:a16="http://schemas.microsoft.com/office/drawing/2014/main" id="{6ED8D458-4DBF-4B21-A52F-15D4EA1DDC01}"/>
+                <a16:creationId xmlns:a16="http://schemas.microsoft.com/office/drawing/2014/main" id="{A34FD3B5-C0F9-4149-81E1-B5A7E6DE8417}"/>
               </a:ext>
             </a:extLst>
           </p:cNvPr>
@@ -2922,7 +2922,7 @@
           <p:cNvPr id="11" name="">
             <a:extLst xmlns:a="http://schemas.openxmlformats.org/drawingml/2006/main">
               <a:ext uri="{FF2B5EF4-FFF2-40B4-BE49-F238E27FC236}">
-                <a16:creationId xmlns:a16="http://schemas.microsoft.com/office/drawing/2014/main" id="{EA9689F2-CE22-41D1-98CE-BAEDFE4A96E5}"/>
+                <a16:creationId xmlns:a16="http://schemas.microsoft.com/office/drawing/2014/main" id="{58880C48-BBE5-4E08-8D7A-2C7A393392D5}"/>
               </a:ext>
             </a:extLst>
           </p:cNvPr>
@@ -2979,7 +2979,7 @@
           <p:cNvPr id="12" name="">
             <a:extLst xmlns:a="http://schemas.openxmlformats.org/drawingml/2006/main">
               <a:ext uri="{FF2B5EF4-FFF2-40B4-BE49-F238E27FC236}">
-                <a16:creationId xmlns:a16="http://schemas.microsoft.com/office/drawing/2014/main" id="{B0B6A49F-987A-4E5E-8DEA-7417B86F5EAE}"/>
+                <a16:creationId xmlns:a16="http://schemas.microsoft.com/office/drawing/2014/main" id="{0EED1DC0-DE90-47AC-B5C0-20899604ABD1}"/>
               </a:ext>
             </a:extLst>
           </p:cNvPr>
@@ -3036,7 +3036,7 @@
           <p:cNvPr id="13" name="">
             <a:extLst xmlns:a="http://schemas.openxmlformats.org/drawingml/2006/main">
               <a:ext uri="{FF2B5EF4-FFF2-40B4-BE49-F238E27FC236}">
-                <a16:creationId xmlns:a16="http://schemas.microsoft.com/office/drawing/2014/main" id="{02D1E5CD-473F-44FB-BAD3-729F3C80B24F}"/>
+                <a16:creationId xmlns:a16="http://schemas.microsoft.com/office/drawing/2014/main" id="{55DBB3C2-75E1-4C9D-B170-E01B4420D380}"/>
               </a:ext>
             </a:extLst>
           </p:cNvPr>
@@ -3091,7 +3091,7 @@
     </p:spTree>
     <p:extLst>
       <p:ext uri="{BB962C8B-B14F-4D97-AF65-F5344CB8AC3E}">
-        <p14:creationId xmlns:p14="http://schemas.microsoft.com/office/powerpoint/2010/main" val="1966065889"/>
+        <p14:creationId xmlns:p14="http://schemas.microsoft.com/office/powerpoint/2010/main" val="1918669354"/>
       </p:ext>
     </p:extLst>
   </p:cSld>
@@ -3292,7 +3292,7 @@
           <p:cNvPr id="19" name="">
             <a:extLst xmlns:a="http://schemas.openxmlformats.org/drawingml/2006/main">
               <a:ext uri="{FF2B5EF4-FFF2-40B4-BE49-F238E27FC236}">
-                <a16:creationId xmlns:a16="http://schemas.microsoft.com/office/drawing/2014/main" id="{46D7DDDB-DBDF-4A1D-A694-85A59743CF3E}"/>
+                <a16:creationId xmlns:a16="http://schemas.microsoft.com/office/drawing/2014/main" id="{26A06175-58D6-4F99-A424-02D4860EAD57}"/>
               </a:ext>
             </a:extLst>
           </p:cNvPr>
@@ -3324,7 +3324,7 @@
           <p:cNvPr id="2" name="">
             <a:extLst xmlns:a="http://schemas.openxmlformats.org/drawingml/2006/main">
               <a:ext uri="{FF2B5EF4-FFF2-40B4-BE49-F238E27FC236}">
-                <a16:creationId xmlns:a16="http://schemas.microsoft.com/office/drawing/2014/main" id="{424D1C0C-81AF-4A12-8289-4E725F63D338}"/>
+                <a16:creationId xmlns:a16="http://schemas.microsoft.com/office/drawing/2014/main" id="{243FCE8D-3D3A-43C0-AF48-CAEC36B8B4E8}"/>
               </a:ext>
             </a:extLst>
           </p:cNvPr>
@@ -3381,7 +3381,7 @@
           <p:cNvPr id="3" name="">
             <a:extLst xmlns:a="http://schemas.openxmlformats.org/drawingml/2006/main">
               <a:ext uri="{FF2B5EF4-FFF2-40B4-BE49-F238E27FC236}">
-                <a16:creationId xmlns:a16="http://schemas.microsoft.com/office/drawing/2014/main" id="{B2848AC3-17F5-48BA-B239-C4C6C54D4080}"/>
+                <a16:creationId xmlns:a16="http://schemas.microsoft.com/office/drawing/2014/main" id="{FC999A1D-2AD5-49E0-A71F-C13674C86B4A}"/>
               </a:ext>
             </a:extLst>
           </p:cNvPr>
@@ -3413,7 +3413,7 @@
           <p:cNvPr id="4" name="">
             <a:extLst xmlns:a="http://schemas.openxmlformats.org/drawingml/2006/main">
               <a:ext uri="{FF2B5EF4-FFF2-40B4-BE49-F238E27FC236}">
-                <a16:creationId xmlns:a16="http://schemas.microsoft.com/office/drawing/2014/main" id="{C30B0733-8416-419A-9C26-9C564D86CA17}"/>
+                <a16:creationId xmlns:a16="http://schemas.microsoft.com/office/drawing/2014/main" id="{4209F76D-D7FD-4F64-A78F-413553DD5D99}"/>
               </a:ext>
             </a:extLst>
           </p:cNvPr>
@@ -3470,7 +3470,7 @@
           <p:cNvPr id="5" name="">
             <a:extLst xmlns:a="http://schemas.openxmlformats.org/drawingml/2006/main">
               <a:ext uri="{FF2B5EF4-FFF2-40B4-BE49-F238E27FC236}">
-                <a16:creationId xmlns:a16="http://schemas.microsoft.com/office/drawing/2014/main" id="{94FF1FDC-130A-4258-810B-0D95926DF499}"/>
+                <a16:creationId xmlns:a16="http://schemas.microsoft.com/office/drawing/2014/main" id="{5BA9D167-F99B-4FFF-BA67-14DB21E280C5}"/>
               </a:ext>
             </a:extLst>
           </p:cNvPr>
@@ -3527,7 +3527,7 @@
           <p:cNvPr id="6" name="">
             <a:extLst xmlns:a="http://schemas.openxmlformats.org/drawingml/2006/main">
               <a:ext uri="{FF2B5EF4-FFF2-40B4-BE49-F238E27FC236}">
-                <a16:creationId xmlns:a16="http://schemas.microsoft.com/office/drawing/2014/main" id="{967F905F-FAA1-49A3-82F5-FA69DE568205}"/>
+                <a16:creationId xmlns:a16="http://schemas.microsoft.com/office/drawing/2014/main" id="{0F450223-25CE-4B40-AD11-141C6D035162}"/>
               </a:ext>
             </a:extLst>
           </p:cNvPr>
@@ -3584,7 +3584,7 @@
           <p:cNvPr id="7" name="">
             <a:extLst xmlns:a="http://schemas.openxmlformats.org/drawingml/2006/main">
               <a:ext uri="{FF2B5EF4-FFF2-40B4-BE49-F238E27FC236}">
-                <a16:creationId xmlns:a16="http://schemas.microsoft.com/office/drawing/2014/main" id="{9B0A7BCF-BA5D-4FC8-921C-B832661082A0}"/>
+                <a16:creationId xmlns:a16="http://schemas.microsoft.com/office/drawing/2014/main" id="{8B839CD8-B47E-454B-91EC-AD5C57D477A1}"/>
               </a:ext>
             </a:extLst>
           </p:cNvPr>
@@ -3616,7 +3616,7 @@
           <p:cNvPr id="8" name="">
             <a:extLst xmlns:a="http://schemas.openxmlformats.org/drawingml/2006/main">
               <a:ext uri="{FF2B5EF4-FFF2-40B4-BE49-F238E27FC236}">
-                <a16:creationId xmlns:a16="http://schemas.microsoft.com/office/drawing/2014/main" id="{377DD096-73A8-4BF2-9252-2D62679F72E2}"/>
+                <a16:creationId xmlns:a16="http://schemas.microsoft.com/office/drawing/2014/main" id="{968EA83C-65E5-4411-A425-6E5BB113C404}"/>
               </a:ext>
             </a:extLst>
           </p:cNvPr>
@@ -3673,7 +3673,7 @@
           <p:cNvPr id="9" name="">
             <a:extLst xmlns:a="http://schemas.openxmlformats.org/drawingml/2006/main">
               <a:ext uri="{FF2B5EF4-FFF2-40B4-BE49-F238E27FC236}">
-                <a16:creationId xmlns:a16="http://schemas.microsoft.com/office/drawing/2014/main" id="{E46883B0-6FEE-4F79-B42B-DBC6208E3BE9}"/>
+                <a16:creationId xmlns:a16="http://schemas.microsoft.com/office/drawing/2014/main" id="{3A4C70FD-A9B8-473C-83AE-8352AC9085F0}"/>
               </a:ext>
             </a:extLst>
           </p:cNvPr>
@@ -3730,7 +3730,7 @@
           <p:cNvPr id="10" name="">
             <a:extLst xmlns:a="http://schemas.openxmlformats.org/drawingml/2006/main">
               <a:ext uri="{FF2B5EF4-FFF2-40B4-BE49-F238E27FC236}">
-                <a16:creationId xmlns:a16="http://schemas.microsoft.com/office/drawing/2014/main" id="{C53FC73E-8A01-4EFF-904D-9B422C01EB15}"/>
+                <a16:creationId xmlns:a16="http://schemas.microsoft.com/office/drawing/2014/main" id="{C55D7D81-A9BE-4240-9199-90AFAC119DD9}"/>
               </a:ext>
             </a:extLst>
           </p:cNvPr>
@@ -3787,7 +3787,7 @@
           <p:cNvPr id="11" name="">
             <a:extLst xmlns:a="http://schemas.openxmlformats.org/drawingml/2006/main">
               <a:ext uri="{FF2B5EF4-FFF2-40B4-BE49-F238E27FC236}">
-                <a16:creationId xmlns:a16="http://schemas.microsoft.com/office/drawing/2014/main" id="{43771CBB-D01D-4E04-AD67-E4A1DD6B49A9}"/>
+                <a16:creationId xmlns:a16="http://schemas.microsoft.com/office/drawing/2014/main" id="{D3FDE4F2-CC25-41CD-951C-89947C822672}"/>
               </a:ext>
             </a:extLst>
           </p:cNvPr>
@@ -3821,7 +3821,7 @@
           <p:cNvPr id="12" name="">
             <a:extLst xmlns:a="http://schemas.openxmlformats.org/drawingml/2006/main">
               <a:ext uri="{FF2B5EF4-FFF2-40B4-BE49-F238E27FC236}">
-                <a16:creationId xmlns:a16="http://schemas.microsoft.com/office/drawing/2014/main" id="{E3A5ED49-9AA5-4FA9-918E-F454A7E2D1F5}"/>
+                <a16:creationId xmlns:a16="http://schemas.microsoft.com/office/drawing/2014/main" id="{770AD185-BD21-441E-8939-96930861A171}"/>
               </a:ext>
             </a:extLst>
           </p:cNvPr>
@@ -3878,7 +3878,7 @@
           <p:cNvPr id="13" name="">
             <a:extLst xmlns:a="http://schemas.openxmlformats.org/drawingml/2006/main">
               <a:ext uri="{FF2B5EF4-FFF2-40B4-BE49-F238E27FC236}">
-                <a16:creationId xmlns:a16="http://schemas.microsoft.com/office/drawing/2014/main" id="{FCF047A8-D48C-4AA3-BE77-1F4E8F6DE430}"/>
+                <a16:creationId xmlns:a16="http://schemas.microsoft.com/office/drawing/2014/main" id="{ED5E88D6-6B87-4045-A771-38C71CBCF816}"/>
               </a:ext>
             </a:extLst>
           </p:cNvPr>
@@ -3935,7 +3935,7 @@
           <p:cNvPr id="14" name="">
             <a:extLst xmlns:a="http://schemas.openxmlformats.org/drawingml/2006/main">
               <a:ext uri="{FF2B5EF4-FFF2-40B4-BE49-F238E27FC236}">
-                <a16:creationId xmlns:a16="http://schemas.microsoft.com/office/drawing/2014/main" id="{498032D9-CA5B-46D3-94CC-21C476FAD4FB}"/>
+                <a16:creationId xmlns:a16="http://schemas.microsoft.com/office/drawing/2014/main" id="{1336B560-D7F3-47FD-B906-FB71CD7F7501}"/>
               </a:ext>
             </a:extLst>
           </p:cNvPr>
@@ -3992,7 +3992,7 @@
           <p:cNvPr id="15" name="">
             <a:extLst xmlns:a="http://schemas.openxmlformats.org/drawingml/2006/main">
               <a:ext uri="{FF2B5EF4-FFF2-40B4-BE49-F238E27FC236}">
-                <a16:creationId xmlns:a16="http://schemas.microsoft.com/office/drawing/2014/main" id="{E25D1C55-3998-4ADA-BE12-CD7D64A8D48C}"/>
+                <a16:creationId xmlns:a16="http://schemas.microsoft.com/office/drawing/2014/main" id="{04A9389C-BFE7-4EC4-AEEC-312D571FFD79}"/>
               </a:ext>
             </a:extLst>
           </p:cNvPr>
@@ -4026,7 +4026,7 @@
           <p:cNvPr id="16" name="">
             <a:extLst xmlns:a="http://schemas.openxmlformats.org/drawingml/2006/main">
               <a:ext uri="{FF2B5EF4-FFF2-40B4-BE49-F238E27FC236}">
-                <a16:creationId xmlns:a16="http://schemas.microsoft.com/office/drawing/2014/main" id="{3859CDD0-A533-4F5C-AB2E-0F45ABDD93CA}"/>
+                <a16:creationId xmlns:a16="http://schemas.microsoft.com/office/drawing/2014/main" id="{434F4A79-104A-45C9-AAF7-5A6FC0A21A7F}"/>
               </a:ext>
             </a:extLst>
           </p:cNvPr>
@@ -4083,7 +4083,7 @@
           <p:cNvPr id="17" name="">
             <a:extLst xmlns:a="http://schemas.openxmlformats.org/drawingml/2006/main">
               <a:ext uri="{FF2B5EF4-FFF2-40B4-BE49-F238E27FC236}">
-                <a16:creationId xmlns:a16="http://schemas.microsoft.com/office/drawing/2014/main" id="{FC228B0F-95CC-443B-8B35-203A55E33BB0}"/>
+                <a16:creationId xmlns:a16="http://schemas.microsoft.com/office/drawing/2014/main" id="{247CC1B2-C7A2-420B-B320-CF4EA428A44E}"/>
               </a:ext>
             </a:extLst>
           </p:cNvPr>
@@ -4140,7 +4140,7 @@
           <p:cNvPr id="18" name="">
             <a:extLst xmlns:a="http://schemas.openxmlformats.org/drawingml/2006/main">
               <a:ext uri="{FF2B5EF4-FFF2-40B4-BE49-F238E27FC236}">
-                <a16:creationId xmlns:a16="http://schemas.microsoft.com/office/drawing/2014/main" id="{E0F73879-8F0A-4C9C-9463-626C9D74DBFD}"/>
+                <a16:creationId xmlns:a16="http://schemas.microsoft.com/office/drawing/2014/main" id="{020473E3-31A7-47AB-B4AE-ADF915E08E7E}"/>
               </a:ext>
             </a:extLst>
           </p:cNvPr>
@@ -4195,7 +4195,7 @@
     </p:spTree>
     <p:extLst>
       <p:ext uri="{BB962C8B-B14F-4D97-AF65-F5344CB8AC3E}">
-        <p14:creationId xmlns:p14="http://schemas.microsoft.com/office/powerpoint/2010/main" val="2048028987"/>
+        <p14:creationId xmlns:p14="http://schemas.microsoft.com/office/powerpoint/2010/main" val="741390657"/>
       </p:ext>
     </p:extLst>
   </p:cSld>
@@ -4350,7 +4350,7 @@
           <p:cNvPr id="23" name="">
             <a:extLst xmlns:a="http://schemas.openxmlformats.org/drawingml/2006/main">
               <a:ext uri="{FF2B5EF4-FFF2-40B4-BE49-F238E27FC236}">
-                <a16:creationId xmlns:a16="http://schemas.microsoft.com/office/drawing/2014/main" id="{DC82CAA0-7D3F-459E-846F-5468994D00D1}"/>
+                <a16:creationId xmlns:a16="http://schemas.microsoft.com/office/drawing/2014/main" id="{881739C0-0361-4E51-AB12-725E85B0D61F}"/>
               </a:ext>
             </a:extLst>
           </p:cNvPr>
@@ -4382,7 +4382,7 @@
           <p:cNvPr id="2" name="">
             <a:extLst xmlns:a="http://schemas.openxmlformats.org/drawingml/2006/main">
               <a:ext uri="{FF2B5EF4-FFF2-40B4-BE49-F238E27FC236}">
-                <a16:creationId xmlns:a16="http://schemas.microsoft.com/office/drawing/2014/main" id="{BD986606-CB2A-43FC-9225-FFF8D2BDE76B}"/>
+                <a16:creationId xmlns:a16="http://schemas.microsoft.com/office/drawing/2014/main" id="{EE637A93-BF30-4D6E-A4D1-8A1721BC790E}"/>
               </a:ext>
             </a:extLst>
           </p:cNvPr>
@@ -4439,7 +4439,7 @@
           <p:cNvPr id="3" name="">
             <a:extLst xmlns:a="http://schemas.openxmlformats.org/drawingml/2006/main">
               <a:ext uri="{FF2B5EF4-FFF2-40B4-BE49-F238E27FC236}">
-                <a16:creationId xmlns:a16="http://schemas.microsoft.com/office/drawing/2014/main" id="{9992E60D-5747-43EA-B436-2D51956B8DB9}"/>
+                <a16:creationId xmlns:a16="http://schemas.microsoft.com/office/drawing/2014/main" id="{E97D9928-A937-4B50-8F4A-7294D2550849}"/>
               </a:ext>
             </a:extLst>
           </p:cNvPr>
@@ -4471,7 +4471,7 @@
           <p:cNvPr id="4" name="">
             <a:extLst xmlns:a="http://schemas.openxmlformats.org/drawingml/2006/main">
               <a:ext uri="{FF2B5EF4-FFF2-40B4-BE49-F238E27FC236}">
-                <a16:creationId xmlns:a16="http://schemas.microsoft.com/office/drawing/2014/main" id="{0F2BEF27-36D9-4C13-B383-7E99388A01A1}"/>
+                <a16:creationId xmlns:a16="http://schemas.microsoft.com/office/drawing/2014/main" id="{2346C275-2B72-4880-A854-B9E5B8422ED6}"/>
               </a:ext>
             </a:extLst>
           </p:cNvPr>
@@ -4528,7 +4528,7 @@
           <p:cNvPr id="5" name="">
             <a:extLst xmlns:a="http://schemas.openxmlformats.org/drawingml/2006/main">
               <a:ext uri="{FF2B5EF4-FFF2-40B4-BE49-F238E27FC236}">
-                <a16:creationId xmlns:a16="http://schemas.microsoft.com/office/drawing/2014/main" id="{74B9D520-820C-4CC1-A164-2AFFCC4DE58B}"/>
+                <a16:creationId xmlns:a16="http://schemas.microsoft.com/office/drawing/2014/main" id="{587DF356-87FF-4CEE-A598-7B91A76C1838}"/>
               </a:ext>
             </a:extLst>
           </p:cNvPr>
@@ -4585,7 +4585,7 @@
           <p:cNvPr id="6" name="">
             <a:extLst xmlns:a="http://schemas.openxmlformats.org/drawingml/2006/main">
               <a:ext uri="{FF2B5EF4-FFF2-40B4-BE49-F238E27FC236}">
-                <a16:creationId xmlns:a16="http://schemas.microsoft.com/office/drawing/2014/main" id="{8B4F829D-66B6-4540-B61E-62D5CFA0426D}"/>
+                <a16:creationId xmlns:a16="http://schemas.microsoft.com/office/drawing/2014/main" id="{2D035CF6-89F6-4ABC-9C06-355FAFFDC7F8}"/>
               </a:ext>
             </a:extLst>
           </p:cNvPr>
@@ -4642,7 +4642,7 @@
           <p:cNvPr id="7" name="">
             <a:extLst xmlns:a="http://schemas.openxmlformats.org/drawingml/2006/main">
               <a:ext uri="{FF2B5EF4-FFF2-40B4-BE49-F238E27FC236}">
-                <a16:creationId xmlns:a16="http://schemas.microsoft.com/office/drawing/2014/main" id="{A69B0BC5-32BF-4292-B4D1-E33D3F46E8E4}"/>
+                <a16:creationId xmlns:a16="http://schemas.microsoft.com/office/drawing/2014/main" id="{7BA91AD5-7EC6-449B-8EE5-3E6D80570816}"/>
               </a:ext>
             </a:extLst>
           </p:cNvPr>
@@ -4674,7 +4674,7 @@
           <p:cNvPr id="8" name="">
             <a:extLst xmlns:a="http://schemas.openxmlformats.org/drawingml/2006/main">
               <a:ext uri="{FF2B5EF4-FFF2-40B4-BE49-F238E27FC236}">
-                <a16:creationId xmlns:a16="http://schemas.microsoft.com/office/drawing/2014/main" id="{2FDD306D-3840-4EB0-8007-C7093DD2300B}"/>
+                <a16:creationId xmlns:a16="http://schemas.microsoft.com/office/drawing/2014/main" id="{CBCBF32D-0865-434B-B055-EDCAD12DE9F1}"/>
               </a:ext>
             </a:extLst>
           </p:cNvPr>
@@ -4731,7 +4731,7 @@
           <p:cNvPr id="9" name="">
             <a:extLst xmlns:a="http://schemas.openxmlformats.org/drawingml/2006/main">
               <a:ext uri="{FF2B5EF4-FFF2-40B4-BE49-F238E27FC236}">
-                <a16:creationId xmlns:a16="http://schemas.microsoft.com/office/drawing/2014/main" id="{C96BFBD8-6C8B-4F47-870D-9A7106948168}"/>
+                <a16:creationId xmlns:a16="http://schemas.microsoft.com/office/drawing/2014/main" id="{547D447A-0A2C-44B5-A063-1EE14A28A629}"/>
               </a:ext>
             </a:extLst>
           </p:cNvPr>
@@ -4788,7 +4788,7 @@
           <p:cNvPr id="10" name="">
             <a:extLst xmlns:a="http://schemas.openxmlformats.org/drawingml/2006/main">
               <a:ext uri="{FF2B5EF4-FFF2-40B4-BE49-F238E27FC236}">
-                <a16:creationId xmlns:a16="http://schemas.microsoft.com/office/drawing/2014/main" id="{8F13416E-EB34-4407-8A18-575235A701F1}"/>
+                <a16:creationId xmlns:a16="http://schemas.microsoft.com/office/drawing/2014/main" id="{959D1A5A-06C6-47E7-AE39-18A4B3DD10C8}"/>
               </a:ext>
             </a:extLst>
           </p:cNvPr>
@@ -4822,7 +4822,7 @@
           <p:cNvPr id="11" name="">
             <a:extLst xmlns:a="http://schemas.openxmlformats.org/drawingml/2006/main">
               <a:ext uri="{FF2B5EF4-FFF2-40B4-BE49-F238E27FC236}">
-                <a16:creationId xmlns:a16="http://schemas.microsoft.com/office/drawing/2014/main" id="{5C45F799-14DF-4443-94E9-E2854EF4E42A}"/>
+                <a16:creationId xmlns:a16="http://schemas.microsoft.com/office/drawing/2014/main" id="{C2F8C585-7580-4FB0-A2A2-AB12FD6F385A}"/>
               </a:ext>
             </a:extLst>
           </p:cNvPr>
@@ -4854,7 +4854,7 @@
           <p:cNvPr id="12" name="">
             <a:extLst xmlns:a="http://schemas.openxmlformats.org/drawingml/2006/main">
               <a:ext uri="{FF2B5EF4-FFF2-40B4-BE49-F238E27FC236}">
-                <a16:creationId xmlns:a16="http://schemas.microsoft.com/office/drawing/2014/main" id="{30EB5FE8-7726-416F-8EE6-DE1D50449FF6}"/>
+                <a16:creationId xmlns:a16="http://schemas.microsoft.com/office/drawing/2014/main" id="{2E4B8C6C-0AFA-43F2-AF1E-97418364BE51}"/>
               </a:ext>
             </a:extLst>
           </p:cNvPr>
@@ -4911,7 +4911,7 @@
           <p:cNvPr id="13" name="">
             <a:extLst xmlns:a="http://schemas.openxmlformats.org/drawingml/2006/main">
               <a:ext uri="{FF2B5EF4-FFF2-40B4-BE49-F238E27FC236}">
-                <a16:creationId xmlns:a16="http://schemas.microsoft.com/office/drawing/2014/main" id="{1C10E0BC-FF29-4990-A91D-FFE9D9C81978}"/>
+                <a16:creationId xmlns:a16="http://schemas.microsoft.com/office/drawing/2014/main" id="{D23813E8-C011-4D50-8AE9-48CA3BCD38E3}"/>
               </a:ext>
             </a:extLst>
           </p:cNvPr>
@@ -4968,7 +4968,7 @@
           <p:cNvPr id="14" name="">
             <a:extLst xmlns:a="http://schemas.openxmlformats.org/drawingml/2006/main">
               <a:ext uri="{FF2B5EF4-FFF2-40B4-BE49-F238E27FC236}">
-                <a16:creationId xmlns:a16="http://schemas.microsoft.com/office/drawing/2014/main" id="{5BE23CA9-4676-44CF-B816-542C9BA82AFD}"/>
+                <a16:creationId xmlns:a16="http://schemas.microsoft.com/office/drawing/2014/main" id="{3A9EDF21-CFE9-47BD-A453-F4A9C3FDB4C4}"/>
               </a:ext>
             </a:extLst>
           </p:cNvPr>
@@ -5002,7 +5002,7 @@
           <p:cNvPr id="15" name="">
             <a:extLst xmlns:a="http://schemas.openxmlformats.org/drawingml/2006/main">
               <a:ext uri="{FF2B5EF4-FFF2-40B4-BE49-F238E27FC236}">
-                <a16:creationId xmlns:a16="http://schemas.microsoft.com/office/drawing/2014/main" id="{CB4FC2E7-02F5-4B29-A3F9-D5C78457D946}"/>
+                <a16:creationId xmlns:a16="http://schemas.microsoft.com/office/drawing/2014/main" id="{38636FC9-4EEA-46FC-9E9B-DC6ED2F36B0A}"/>
               </a:ext>
             </a:extLst>
           </p:cNvPr>
@@ -5034,7 +5034,7 @@
           <p:cNvPr id="16" name="">
             <a:extLst xmlns:a="http://schemas.openxmlformats.org/drawingml/2006/main">
               <a:ext uri="{FF2B5EF4-FFF2-40B4-BE49-F238E27FC236}">
-                <a16:creationId xmlns:a16="http://schemas.microsoft.com/office/drawing/2014/main" id="{8315530A-636F-4FF7-B8E1-85CDCDBE75C0}"/>
+                <a16:creationId xmlns:a16="http://schemas.microsoft.com/office/drawing/2014/main" id="{A829E83F-1E83-4C2C-8B1A-44C39EC47E10}"/>
               </a:ext>
             </a:extLst>
           </p:cNvPr>
@@ -5091,7 +5091,7 @@
           <p:cNvPr id="17" name="">
             <a:extLst xmlns:a="http://schemas.openxmlformats.org/drawingml/2006/main">
               <a:ext uri="{FF2B5EF4-FFF2-40B4-BE49-F238E27FC236}">
-                <a16:creationId xmlns:a16="http://schemas.microsoft.com/office/drawing/2014/main" id="{77B1F1B0-670A-4DAA-BA88-33630D75DC87}"/>
+                <a16:creationId xmlns:a16="http://schemas.microsoft.com/office/drawing/2014/main" id="{05A30A3B-FC38-4A77-A789-FF2BB723D639}"/>
               </a:ext>
             </a:extLst>
           </p:cNvPr>
@@ -5148,7 +5148,7 @@
           <p:cNvPr id="18" name="">
             <a:extLst xmlns:a="http://schemas.openxmlformats.org/drawingml/2006/main">
               <a:ext uri="{FF2B5EF4-FFF2-40B4-BE49-F238E27FC236}">
-                <a16:creationId xmlns:a16="http://schemas.microsoft.com/office/drawing/2014/main" id="{4BCCD033-6C7C-4161-8A09-24E3098C9414}"/>
+                <a16:creationId xmlns:a16="http://schemas.microsoft.com/office/drawing/2014/main" id="{B68008F1-72A4-425C-8197-4D89C8122FDA}"/>
               </a:ext>
             </a:extLst>
           </p:cNvPr>
@@ -5182,7 +5182,7 @@
           <p:cNvPr id="19" name="">
             <a:extLst xmlns:a="http://schemas.openxmlformats.org/drawingml/2006/main">
               <a:ext uri="{FF2B5EF4-FFF2-40B4-BE49-F238E27FC236}">
-                <a16:creationId xmlns:a16="http://schemas.microsoft.com/office/drawing/2014/main" id="{F2B47078-90EC-41FE-B263-EAE0EE029274}"/>
+                <a16:creationId xmlns:a16="http://schemas.microsoft.com/office/drawing/2014/main" id="{818311B8-6E7B-4E90-90D4-D00137B78B20}"/>
               </a:ext>
             </a:extLst>
           </p:cNvPr>
@@ -5214,7 +5214,7 @@
           <p:cNvPr id="20" name="">
             <a:extLst xmlns:a="http://schemas.openxmlformats.org/drawingml/2006/main">
               <a:ext uri="{FF2B5EF4-FFF2-40B4-BE49-F238E27FC236}">
-                <a16:creationId xmlns:a16="http://schemas.microsoft.com/office/drawing/2014/main" id="{5AD7AE1F-82A0-4673-9CB0-94058A94CAF9}"/>
+                <a16:creationId xmlns:a16="http://schemas.microsoft.com/office/drawing/2014/main" id="{5E8A9B16-D184-4EE8-8C98-728A4443117A}"/>
               </a:ext>
             </a:extLst>
           </p:cNvPr>
@@ -5271,7 +5271,7 @@
           <p:cNvPr id="21" name="">
             <a:extLst xmlns:a="http://schemas.openxmlformats.org/drawingml/2006/main">
               <a:ext uri="{FF2B5EF4-FFF2-40B4-BE49-F238E27FC236}">
-                <a16:creationId xmlns:a16="http://schemas.microsoft.com/office/drawing/2014/main" id="{7D873990-4796-4E69-BC92-F9D3D368830B}"/>
+                <a16:creationId xmlns:a16="http://schemas.microsoft.com/office/drawing/2014/main" id="{5680D982-D195-4AFF-8A96-1A0B9F8B4959}"/>
               </a:ext>
             </a:extLst>
           </p:cNvPr>
@@ -5328,7 +5328,7 @@
           <p:cNvPr id="22" name="">
             <a:extLst xmlns:a="http://schemas.openxmlformats.org/drawingml/2006/main">
               <a:ext uri="{FF2B5EF4-FFF2-40B4-BE49-F238E27FC236}">
-                <a16:creationId xmlns:a16="http://schemas.microsoft.com/office/drawing/2014/main" id="{6ADAA3AE-5987-4FA9-A09E-F605C823C304}"/>
+                <a16:creationId xmlns:a16="http://schemas.microsoft.com/office/drawing/2014/main" id="{EFBB13BB-5462-4521-9A7A-E7B130E0E371}"/>
               </a:ext>
             </a:extLst>
           </p:cNvPr>
@@ -5383,7 +5383,7 @@
     </p:spTree>
     <p:extLst>
       <p:ext uri="{BB962C8B-B14F-4D97-AF65-F5344CB8AC3E}">
-        <p14:creationId xmlns:p14="http://schemas.microsoft.com/office/powerpoint/2010/main" val="139566094"/>
+        <p14:creationId xmlns:p14="http://schemas.microsoft.com/office/powerpoint/2010/main" val="1829463909"/>
       </p:ext>
     </p:extLst>
   </p:cSld>
@@ -5584,7 +5584,7 @@
           <p:cNvPr id="23" name="">
             <a:extLst xmlns:a="http://schemas.openxmlformats.org/drawingml/2006/main">
               <a:ext uri="{FF2B5EF4-FFF2-40B4-BE49-F238E27FC236}">
-                <a16:creationId xmlns:a16="http://schemas.microsoft.com/office/drawing/2014/main" id="{90AC2A1C-788F-48A3-AE25-BF3F9A19B659}"/>
+                <a16:creationId xmlns:a16="http://schemas.microsoft.com/office/drawing/2014/main" id="{A1D196F3-C252-445F-9F51-BFA3499D35F2}"/>
               </a:ext>
             </a:extLst>
           </p:cNvPr>
@@ -5616,7 +5616,7 @@
           <p:cNvPr id="2" name="">
             <a:extLst xmlns:a="http://schemas.openxmlformats.org/drawingml/2006/main">
               <a:ext uri="{FF2B5EF4-FFF2-40B4-BE49-F238E27FC236}">
-                <a16:creationId xmlns:a16="http://schemas.microsoft.com/office/drawing/2014/main" id="{2ADC5DC8-DF46-49C5-9D13-65FE16FB0A31}"/>
+                <a16:creationId xmlns:a16="http://schemas.microsoft.com/office/drawing/2014/main" id="{174F1D70-552F-4500-9B7C-500D05DEDCAA}"/>
               </a:ext>
             </a:extLst>
           </p:cNvPr>
@@ -5673,7 +5673,7 @@
           <p:cNvPr id="3" name="">
             <a:extLst xmlns:a="http://schemas.openxmlformats.org/drawingml/2006/main">
               <a:ext uri="{FF2B5EF4-FFF2-40B4-BE49-F238E27FC236}">
-                <a16:creationId xmlns:a16="http://schemas.microsoft.com/office/drawing/2014/main" id="{62E35D52-A136-4319-86A9-BF99FB05A25D}"/>
+                <a16:creationId xmlns:a16="http://schemas.microsoft.com/office/drawing/2014/main" id="{D36FCFDB-F28D-4ED0-BC2E-1F1EFD145E61}"/>
               </a:ext>
             </a:extLst>
           </p:cNvPr>
@@ -5705,7 +5705,7 @@
           <p:cNvPr id="4" name="">
             <a:extLst xmlns:a="http://schemas.openxmlformats.org/drawingml/2006/main">
               <a:ext uri="{FF2B5EF4-FFF2-40B4-BE49-F238E27FC236}">
-                <a16:creationId xmlns:a16="http://schemas.microsoft.com/office/drawing/2014/main" id="{AA3C71DC-E93F-42DB-AFB7-FBDD36140C27}"/>
+                <a16:creationId xmlns:a16="http://schemas.microsoft.com/office/drawing/2014/main" id="{201817A5-40EA-4CB7-AF75-E6110FE96527}"/>
               </a:ext>
             </a:extLst>
           </p:cNvPr>
@@ -5762,7 +5762,7 @@
           <p:cNvPr id="5" name="">
             <a:extLst xmlns:a="http://schemas.openxmlformats.org/drawingml/2006/main">
               <a:ext uri="{FF2B5EF4-FFF2-40B4-BE49-F238E27FC236}">
-                <a16:creationId xmlns:a16="http://schemas.microsoft.com/office/drawing/2014/main" id="{1D409CF4-788A-453A-87EC-0F6B956350C7}"/>
+                <a16:creationId xmlns:a16="http://schemas.microsoft.com/office/drawing/2014/main" id="{0F95D17E-B21F-4580-8487-365D0776DE78}"/>
               </a:ext>
             </a:extLst>
           </p:cNvPr>
@@ -5819,7 +5819,7 @@
           <p:cNvPr id="6" name="">
             <a:extLst xmlns:a="http://schemas.openxmlformats.org/drawingml/2006/main">
               <a:ext uri="{FF2B5EF4-FFF2-40B4-BE49-F238E27FC236}">
-                <a16:creationId xmlns:a16="http://schemas.microsoft.com/office/drawing/2014/main" id="{41E68C2E-7195-428F-9318-DCFB43E4661F}"/>
+                <a16:creationId xmlns:a16="http://schemas.microsoft.com/office/drawing/2014/main" id="{385E0D72-8FB6-43AA-92EB-ACB176DB8E8B}"/>
               </a:ext>
             </a:extLst>
           </p:cNvPr>
@@ -5876,7 +5876,7 @@
           <p:cNvPr id="7" name="">
             <a:extLst xmlns:a="http://schemas.openxmlformats.org/drawingml/2006/main">
               <a:ext uri="{FF2B5EF4-FFF2-40B4-BE49-F238E27FC236}">
-                <a16:creationId xmlns:a16="http://schemas.microsoft.com/office/drawing/2014/main" id="{32EE4A06-DDE0-4A61-9F69-76A7E9F6ABE7}"/>
+                <a16:creationId xmlns:a16="http://schemas.microsoft.com/office/drawing/2014/main" id="{FB154A0C-6607-4E10-9EAC-A760EE54B3D7}"/>
               </a:ext>
             </a:extLst>
           </p:cNvPr>
@@ -5908,7 +5908,7 @@
           <p:cNvPr id="8" name="">
             <a:extLst xmlns:a="http://schemas.openxmlformats.org/drawingml/2006/main">
               <a:ext uri="{FF2B5EF4-FFF2-40B4-BE49-F238E27FC236}">
-                <a16:creationId xmlns:a16="http://schemas.microsoft.com/office/drawing/2014/main" id="{5312466C-E96F-406B-9BC2-000E77E0AD55}"/>
+                <a16:creationId xmlns:a16="http://schemas.microsoft.com/office/drawing/2014/main" id="{855973A4-92BF-4383-BAEA-AE126DD228CE}"/>
               </a:ext>
             </a:extLst>
           </p:cNvPr>
@@ -5965,7 +5965,7 @@
           <p:cNvPr id="9" name="">
             <a:extLst xmlns:a="http://schemas.openxmlformats.org/drawingml/2006/main">
               <a:ext uri="{FF2B5EF4-FFF2-40B4-BE49-F238E27FC236}">
-                <a16:creationId xmlns:a16="http://schemas.microsoft.com/office/drawing/2014/main" id="{971B9768-2C70-4862-A0A9-EBC712F36762}"/>
+                <a16:creationId xmlns:a16="http://schemas.microsoft.com/office/drawing/2014/main" id="{27350D50-5527-4259-B763-96E428558913}"/>
               </a:ext>
             </a:extLst>
           </p:cNvPr>
@@ -6022,7 +6022,7 @@
           <p:cNvPr id="10" name="">
             <a:extLst xmlns:a="http://schemas.openxmlformats.org/drawingml/2006/main">
               <a:ext uri="{FF2B5EF4-FFF2-40B4-BE49-F238E27FC236}">
-                <a16:creationId xmlns:a16="http://schemas.microsoft.com/office/drawing/2014/main" id="{B7F40957-F12B-45F2-9076-8C68C4F9FA2B}"/>
+                <a16:creationId xmlns:a16="http://schemas.microsoft.com/office/drawing/2014/main" id="{3965A754-74F1-4D06-943B-E4C50D7E8630}"/>
               </a:ext>
             </a:extLst>
           </p:cNvPr>
@@ -6056,7 +6056,7 @@
           <p:cNvPr id="11" name="">
             <a:extLst xmlns:a="http://schemas.openxmlformats.org/drawingml/2006/main">
               <a:ext uri="{FF2B5EF4-FFF2-40B4-BE49-F238E27FC236}">
-                <a16:creationId xmlns:a16="http://schemas.microsoft.com/office/drawing/2014/main" id="{FEA11C3A-85BA-45CD-8599-7CF0BBA7D027}"/>
+                <a16:creationId xmlns:a16="http://schemas.microsoft.com/office/drawing/2014/main" id="{3721E605-0618-4B49-90D0-8AF239411205}"/>
               </a:ext>
             </a:extLst>
           </p:cNvPr>
@@ -6088,7 +6088,7 @@
           <p:cNvPr id="12" name="">
             <a:extLst xmlns:a="http://schemas.openxmlformats.org/drawingml/2006/main">
               <a:ext uri="{FF2B5EF4-FFF2-40B4-BE49-F238E27FC236}">
-                <a16:creationId xmlns:a16="http://schemas.microsoft.com/office/drawing/2014/main" id="{47945F57-88B8-4FCF-BC3A-646C97582BDE}"/>
+                <a16:creationId xmlns:a16="http://schemas.microsoft.com/office/drawing/2014/main" id="{7E51EEAA-E47F-42F3-A7B4-F3AFBC1C9740}"/>
               </a:ext>
             </a:extLst>
           </p:cNvPr>
@@ -6145,7 +6145,7 @@
           <p:cNvPr id="13" name="">
             <a:extLst xmlns:a="http://schemas.openxmlformats.org/drawingml/2006/main">
               <a:ext uri="{FF2B5EF4-FFF2-40B4-BE49-F238E27FC236}">
-                <a16:creationId xmlns:a16="http://schemas.microsoft.com/office/drawing/2014/main" id="{0956155E-C7F5-480A-BA5E-F8AB42D5EEDA}"/>
+                <a16:creationId xmlns:a16="http://schemas.microsoft.com/office/drawing/2014/main" id="{1834D837-8BF2-4F52-B98A-06481CF1C2F7}"/>
               </a:ext>
             </a:extLst>
           </p:cNvPr>
@@ -6202,7 +6202,7 @@
           <p:cNvPr id="14" name="">
             <a:extLst xmlns:a="http://schemas.openxmlformats.org/drawingml/2006/main">
               <a:ext uri="{FF2B5EF4-FFF2-40B4-BE49-F238E27FC236}">
-                <a16:creationId xmlns:a16="http://schemas.microsoft.com/office/drawing/2014/main" id="{384F0680-8E86-4D60-9722-6D954BF82B79}"/>
+                <a16:creationId xmlns:a16="http://schemas.microsoft.com/office/drawing/2014/main" id="{DBFE2419-C120-4790-9FE1-E7ACB4A86105}"/>
               </a:ext>
             </a:extLst>
           </p:cNvPr>
@@ -6236,7 +6236,7 @@
           <p:cNvPr id="15" name="">
             <a:extLst xmlns:a="http://schemas.openxmlformats.org/drawingml/2006/main">
               <a:ext uri="{FF2B5EF4-FFF2-40B4-BE49-F238E27FC236}">
-                <a16:creationId xmlns:a16="http://schemas.microsoft.com/office/drawing/2014/main" id="{45E01461-00FC-4106-BB1A-87CF43812A4D}"/>
+                <a16:creationId xmlns:a16="http://schemas.microsoft.com/office/drawing/2014/main" id="{685FD69A-EFF7-450E-BDC4-CE226746F1C8}"/>
               </a:ext>
             </a:extLst>
           </p:cNvPr>
@@ -6268,7 +6268,7 @@
           <p:cNvPr id="16" name="">
             <a:extLst xmlns:a="http://schemas.openxmlformats.org/drawingml/2006/main">
               <a:ext uri="{FF2B5EF4-FFF2-40B4-BE49-F238E27FC236}">
-                <a16:creationId xmlns:a16="http://schemas.microsoft.com/office/drawing/2014/main" id="{65C7F903-9C3C-4333-BDE5-0C2711416D5F}"/>
+                <a16:creationId xmlns:a16="http://schemas.microsoft.com/office/drawing/2014/main" id="{D24DD483-FBF7-4FF8-A679-FB57DCD1394C}"/>
               </a:ext>
             </a:extLst>
           </p:cNvPr>
@@ -6325,7 +6325,7 @@
           <p:cNvPr id="17" name="">
             <a:extLst xmlns:a="http://schemas.openxmlformats.org/drawingml/2006/main">
               <a:ext uri="{FF2B5EF4-FFF2-40B4-BE49-F238E27FC236}">
-                <a16:creationId xmlns:a16="http://schemas.microsoft.com/office/drawing/2014/main" id="{A704F67F-9CC4-4762-B087-2121BC95B27E}"/>
+                <a16:creationId xmlns:a16="http://schemas.microsoft.com/office/drawing/2014/main" id="{D3148041-ACAE-447B-B5FE-E7FFA305E468}"/>
               </a:ext>
             </a:extLst>
           </p:cNvPr>
@@ -6382,7 +6382,7 @@
           <p:cNvPr id="18" name="">
             <a:extLst xmlns:a="http://schemas.openxmlformats.org/drawingml/2006/main">
               <a:ext uri="{FF2B5EF4-FFF2-40B4-BE49-F238E27FC236}">
-                <a16:creationId xmlns:a16="http://schemas.microsoft.com/office/drawing/2014/main" id="{E8CE35F5-AB03-4985-B9BF-C739950EEB49}"/>
+                <a16:creationId xmlns:a16="http://schemas.microsoft.com/office/drawing/2014/main" id="{2E65AA27-3D78-4D81-8164-9F203FD2B18D}"/>
               </a:ext>
             </a:extLst>
           </p:cNvPr>
@@ -6416,7 +6416,7 @@
           <p:cNvPr id="19" name="">
             <a:extLst xmlns:a="http://schemas.openxmlformats.org/drawingml/2006/main">
               <a:ext uri="{FF2B5EF4-FFF2-40B4-BE49-F238E27FC236}">
-                <a16:creationId xmlns:a16="http://schemas.microsoft.com/office/drawing/2014/main" id="{06852C82-E158-492A-9409-11081EB24B42}"/>
+                <a16:creationId xmlns:a16="http://schemas.microsoft.com/office/drawing/2014/main" id="{CEE9955F-391D-488A-8539-9B48CF134375}"/>
               </a:ext>
             </a:extLst>
           </p:cNvPr>
@@ -6448,7 +6448,7 @@
           <p:cNvPr id="20" name="">
             <a:extLst xmlns:a="http://schemas.openxmlformats.org/drawingml/2006/main">
               <a:ext uri="{FF2B5EF4-FFF2-40B4-BE49-F238E27FC236}">
-                <a16:creationId xmlns:a16="http://schemas.microsoft.com/office/drawing/2014/main" id="{1E5C7E14-ADAE-4EE0-A27F-F51E33A79C2C}"/>
+                <a16:creationId xmlns:a16="http://schemas.microsoft.com/office/drawing/2014/main" id="{1D493E15-0A4F-4D7B-9CB6-05982FD37E49}"/>
               </a:ext>
             </a:extLst>
           </p:cNvPr>
@@ -6505,7 +6505,7 @@
           <p:cNvPr id="21" name="">
             <a:extLst xmlns:a="http://schemas.openxmlformats.org/drawingml/2006/main">
               <a:ext uri="{FF2B5EF4-FFF2-40B4-BE49-F238E27FC236}">
-                <a16:creationId xmlns:a16="http://schemas.microsoft.com/office/drawing/2014/main" id="{64E39E0F-CF61-4FAA-AC87-F16A8BF8029F}"/>
+                <a16:creationId xmlns:a16="http://schemas.microsoft.com/office/drawing/2014/main" id="{6969B7E0-D8EF-4DC5-958E-F43CB7493FB1}"/>
               </a:ext>
             </a:extLst>
           </p:cNvPr>
@@ -6562,7 +6562,7 @@
           <p:cNvPr id="22" name="">
             <a:extLst xmlns:a="http://schemas.openxmlformats.org/drawingml/2006/main">
               <a:ext uri="{FF2B5EF4-FFF2-40B4-BE49-F238E27FC236}">
-                <a16:creationId xmlns:a16="http://schemas.microsoft.com/office/drawing/2014/main" id="{3901CA1E-42CB-4C48-81EA-6993CFD822B7}"/>
+                <a16:creationId xmlns:a16="http://schemas.microsoft.com/office/drawing/2014/main" id="{05A0E7F3-5DE8-4301-B8D4-EC39B40AAD91}"/>
               </a:ext>
             </a:extLst>
           </p:cNvPr>
@@ -6617,7 +6617,7 @@
     </p:spTree>
     <p:extLst>
       <p:ext uri="{BB962C8B-B14F-4D97-AF65-F5344CB8AC3E}">
-        <p14:creationId xmlns:p14="http://schemas.microsoft.com/office/powerpoint/2010/main" val="962907062"/>
+        <p14:creationId xmlns:p14="http://schemas.microsoft.com/office/powerpoint/2010/main" val="1637001092"/>
       </p:ext>
     </p:extLst>
   </p:cSld>
@@ -6818,7 +6818,7 @@
           <p:cNvPr id="16" name="">
             <a:extLst xmlns:a="http://schemas.openxmlformats.org/drawingml/2006/main">
               <a:ext uri="{FF2B5EF4-FFF2-40B4-BE49-F238E27FC236}">
-                <a16:creationId xmlns:a16="http://schemas.microsoft.com/office/drawing/2014/main" id="{8F8C5DE3-34C1-483C-BF6A-BE848E4E7519}"/>
+                <a16:creationId xmlns:a16="http://schemas.microsoft.com/office/drawing/2014/main" id="{92FAE915-4A1D-474D-B3FE-6E2C0192D332}"/>
               </a:ext>
             </a:extLst>
           </p:cNvPr>
@@ -6850,7 +6850,7 @@
           <p:cNvPr id="2" name="">
             <a:extLst xmlns:a="http://schemas.openxmlformats.org/drawingml/2006/main">
               <a:ext uri="{FF2B5EF4-FFF2-40B4-BE49-F238E27FC236}">
-                <a16:creationId xmlns:a16="http://schemas.microsoft.com/office/drawing/2014/main" id="{B5ADEF21-E1BF-427F-A535-D2E5E1012E84}"/>
+                <a16:creationId xmlns:a16="http://schemas.microsoft.com/office/drawing/2014/main" id="{9EFFA587-FB29-438E-8374-20709F439B60}"/>
               </a:ext>
             </a:extLst>
           </p:cNvPr>
@@ -6907,7 +6907,7 @@
           <p:cNvPr id="3" name="">
             <a:extLst xmlns:a="http://schemas.openxmlformats.org/drawingml/2006/main">
               <a:ext uri="{FF2B5EF4-FFF2-40B4-BE49-F238E27FC236}">
-                <a16:creationId xmlns:a16="http://schemas.microsoft.com/office/drawing/2014/main" id="{32D2AB67-55FC-48DF-87EF-D8A03B713A1E}"/>
+                <a16:creationId xmlns:a16="http://schemas.microsoft.com/office/drawing/2014/main" id="{FE3B562B-CB8E-4891-9B24-D820F522626E}"/>
               </a:ext>
             </a:extLst>
           </p:cNvPr>
@@ -6939,7 +6939,7 @@
           <p:cNvPr id="4" name="">
             <a:extLst xmlns:a="http://schemas.openxmlformats.org/drawingml/2006/main">
               <a:ext uri="{FF2B5EF4-FFF2-40B4-BE49-F238E27FC236}">
-                <a16:creationId xmlns:a16="http://schemas.microsoft.com/office/drawing/2014/main" id="{4DA1B10E-D6A3-4C5E-B209-D4CFECC529CF}"/>
+                <a16:creationId xmlns:a16="http://schemas.microsoft.com/office/drawing/2014/main" id="{B6C7FE7B-EAEA-452B-8260-CDFC8B92CC29}"/>
               </a:ext>
             </a:extLst>
           </p:cNvPr>
@@ -6996,7 +6996,7 @@
           <p:cNvPr id="5" name="">
             <a:extLst xmlns:a="http://schemas.openxmlformats.org/drawingml/2006/main">
               <a:ext uri="{FF2B5EF4-FFF2-40B4-BE49-F238E27FC236}">
-                <a16:creationId xmlns:a16="http://schemas.microsoft.com/office/drawing/2014/main" id="{B1828BB2-7311-44E4-8302-9F5199BF7CD5}"/>
+                <a16:creationId xmlns:a16="http://schemas.microsoft.com/office/drawing/2014/main" id="{9F625208-AB44-41BE-AFE6-B276910BF646}"/>
               </a:ext>
             </a:extLst>
           </p:cNvPr>
@@ -7053,7 +7053,7 @@
           <p:cNvPr id="6" name="">
             <a:extLst xmlns:a="http://schemas.openxmlformats.org/drawingml/2006/main">
               <a:ext uri="{FF2B5EF4-FFF2-40B4-BE49-F238E27FC236}">
-                <a16:creationId xmlns:a16="http://schemas.microsoft.com/office/drawing/2014/main" id="{60066D1A-680B-4347-8512-0A4012397E8D}"/>
+                <a16:creationId xmlns:a16="http://schemas.microsoft.com/office/drawing/2014/main" id="{6FA86DE0-C65D-4D4E-AD96-D694F8B2DD72}"/>
               </a:ext>
             </a:extLst>
           </p:cNvPr>
@@ -7110,7 +7110,7 @@
           <p:cNvPr id="7" name="">
             <a:extLst xmlns:a="http://schemas.openxmlformats.org/drawingml/2006/main">
               <a:ext uri="{FF2B5EF4-FFF2-40B4-BE49-F238E27FC236}">
-                <a16:creationId xmlns:a16="http://schemas.microsoft.com/office/drawing/2014/main" id="{BB7E0CDE-8A5D-4502-91DA-39C3B7251607}"/>
+                <a16:creationId xmlns:a16="http://schemas.microsoft.com/office/drawing/2014/main" id="{18044B99-9903-4DD2-86EB-E2441B6C7FC3}"/>
               </a:ext>
             </a:extLst>
           </p:cNvPr>
@@ -7142,7 +7142,7 @@
           <p:cNvPr id="8" name="">
             <a:extLst xmlns:a="http://schemas.openxmlformats.org/drawingml/2006/main">
               <a:ext uri="{FF2B5EF4-FFF2-40B4-BE49-F238E27FC236}">
-                <a16:creationId xmlns:a16="http://schemas.microsoft.com/office/drawing/2014/main" id="{F13728F4-6E1E-4649-AD2E-860822572B13}"/>
+                <a16:creationId xmlns:a16="http://schemas.microsoft.com/office/drawing/2014/main" id="{52130ED6-2520-4E05-8C17-F95B170A4190}"/>
               </a:ext>
             </a:extLst>
           </p:cNvPr>
@@ -7199,7 +7199,7 @@
           <p:cNvPr id="9" name="">
             <a:extLst xmlns:a="http://schemas.openxmlformats.org/drawingml/2006/main">
               <a:ext uri="{FF2B5EF4-FFF2-40B4-BE49-F238E27FC236}">
-                <a16:creationId xmlns:a16="http://schemas.microsoft.com/office/drawing/2014/main" id="{AA1A9439-8ED4-4B86-B137-C1D14A0AAA66}"/>
+                <a16:creationId xmlns:a16="http://schemas.microsoft.com/office/drawing/2014/main" id="{B225E03E-480C-4C6E-8201-C058BED19335}"/>
               </a:ext>
             </a:extLst>
           </p:cNvPr>
@@ -7256,7 +7256,7 @@
           <p:cNvPr id="10" name="">
             <a:extLst xmlns:a="http://schemas.openxmlformats.org/drawingml/2006/main">
               <a:ext uri="{FF2B5EF4-FFF2-40B4-BE49-F238E27FC236}">
-                <a16:creationId xmlns:a16="http://schemas.microsoft.com/office/drawing/2014/main" id="{080F0F35-017C-49A9-9A90-70FE842C161C}"/>
+                <a16:creationId xmlns:a16="http://schemas.microsoft.com/office/drawing/2014/main" id="{AC7DC3AF-4327-498E-AD61-85A9C16C179D}"/>
               </a:ext>
             </a:extLst>
           </p:cNvPr>
@@ -7313,7 +7313,7 @@
           <p:cNvPr id="11" name="">
             <a:extLst xmlns:a="http://schemas.openxmlformats.org/drawingml/2006/main">
               <a:ext uri="{FF2B5EF4-FFF2-40B4-BE49-F238E27FC236}">
-                <a16:creationId xmlns:a16="http://schemas.microsoft.com/office/drawing/2014/main" id="{77AAEC89-014F-4DC6-9349-7B4F32C378C5}"/>
+                <a16:creationId xmlns:a16="http://schemas.microsoft.com/office/drawing/2014/main" id="{485BA3CD-EABC-457D-8DC1-5C259A9CFE1A}"/>
               </a:ext>
             </a:extLst>
           </p:cNvPr>
@@ -7345,7 +7345,7 @@
           <p:cNvPr id="12" name="">
             <a:extLst xmlns:a="http://schemas.openxmlformats.org/drawingml/2006/main">
               <a:ext uri="{FF2B5EF4-FFF2-40B4-BE49-F238E27FC236}">
-                <a16:creationId xmlns:a16="http://schemas.microsoft.com/office/drawing/2014/main" id="{20D3E3F5-271A-4EBC-AB47-490C36EDC178}"/>
+                <a16:creationId xmlns:a16="http://schemas.microsoft.com/office/drawing/2014/main" id="{2C6C1D8D-99F4-4F73-A3F1-C225AB5C818C}"/>
               </a:ext>
             </a:extLst>
           </p:cNvPr>
@@ -7402,7 +7402,7 @@
           <p:cNvPr id="13" name="">
             <a:extLst xmlns:a="http://schemas.openxmlformats.org/drawingml/2006/main">
               <a:ext uri="{FF2B5EF4-FFF2-40B4-BE49-F238E27FC236}">
-                <a16:creationId xmlns:a16="http://schemas.microsoft.com/office/drawing/2014/main" id="{EE472213-78DE-4B74-ACE4-331CE91C500C}"/>
+                <a16:creationId xmlns:a16="http://schemas.microsoft.com/office/drawing/2014/main" id="{554309D9-531F-492E-9032-03C20DE9D4B3}"/>
               </a:ext>
             </a:extLst>
           </p:cNvPr>
@@ -7459,7 +7459,7 @@
           <p:cNvPr id="14" name="">
             <a:extLst xmlns:a="http://schemas.openxmlformats.org/drawingml/2006/main">
               <a:ext uri="{FF2B5EF4-FFF2-40B4-BE49-F238E27FC236}">
-                <a16:creationId xmlns:a16="http://schemas.microsoft.com/office/drawing/2014/main" id="{44C42A3C-759A-4EC4-8507-5CE66F6BD6CF}"/>
+                <a16:creationId xmlns:a16="http://schemas.microsoft.com/office/drawing/2014/main" id="{5D68214F-3047-435C-9849-FF847C0EB9DF}"/>
               </a:ext>
             </a:extLst>
           </p:cNvPr>
@@ -7516,7 +7516,7 @@
           <p:cNvPr id="15" name="">
             <a:extLst xmlns:a="http://schemas.openxmlformats.org/drawingml/2006/main">
               <a:ext uri="{FF2B5EF4-FFF2-40B4-BE49-F238E27FC236}">
-                <a16:creationId xmlns:a16="http://schemas.microsoft.com/office/drawing/2014/main" id="{E9743D44-A94D-43CC-BCFE-257F266547F3}"/>
+                <a16:creationId xmlns:a16="http://schemas.microsoft.com/office/drawing/2014/main" id="{A25D3266-3144-4D48-A6BA-08A23DED7159}"/>
               </a:ext>
             </a:extLst>
           </p:cNvPr>
@@ -7571,7 +7571,7 @@
     </p:spTree>
     <p:extLst>
       <p:ext uri="{BB962C8B-B14F-4D97-AF65-F5344CB8AC3E}">
-        <p14:creationId xmlns:p14="http://schemas.microsoft.com/office/powerpoint/2010/main" val="1224093725"/>
+        <p14:creationId xmlns:p14="http://schemas.microsoft.com/office/powerpoint/2010/main" val="1893470291"/>
       </p:ext>
     </p:extLst>
   </p:cSld>
@@ -7772,7 +7772,7 @@
           <p:cNvPr id="23" name="">
             <a:extLst xmlns:a="http://schemas.openxmlformats.org/drawingml/2006/main">
               <a:ext uri="{FF2B5EF4-FFF2-40B4-BE49-F238E27FC236}">
-                <a16:creationId xmlns:a16="http://schemas.microsoft.com/office/drawing/2014/main" id="{A88E2787-B49D-4697-942A-2B745AF209EA}"/>
+                <a16:creationId xmlns:a16="http://schemas.microsoft.com/office/drawing/2014/main" id="{B9BBB5C1-BF56-45E1-9728-74D1D8C5BA13}"/>
               </a:ext>
             </a:extLst>
           </p:cNvPr>
@@ -7804,7 +7804,7 @@
           <p:cNvPr id="2" name="">
             <a:extLst xmlns:a="http://schemas.openxmlformats.org/drawingml/2006/main">
               <a:ext uri="{FF2B5EF4-FFF2-40B4-BE49-F238E27FC236}">
-                <a16:creationId xmlns:a16="http://schemas.microsoft.com/office/drawing/2014/main" id="{1D27C9BD-4B26-40EA-93C5-6A05BA81E1BB}"/>
+                <a16:creationId xmlns:a16="http://schemas.microsoft.com/office/drawing/2014/main" id="{BB6D6159-390D-4E53-991B-53E2A504EA97}"/>
               </a:ext>
             </a:extLst>
           </p:cNvPr>
@@ -7861,7 +7861,7 @@
           <p:cNvPr id="3" name="">
             <a:extLst xmlns:a="http://schemas.openxmlformats.org/drawingml/2006/main">
               <a:ext uri="{FF2B5EF4-FFF2-40B4-BE49-F238E27FC236}">
-                <a16:creationId xmlns:a16="http://schemas.microsoft.com/office/drawing/2014/main" id="{5427AF8E-A3D1-4CFD-878D-DB8AF0D65901}"/>
+                <a16:creationId xmlns:a16="http://schemas.microsoft.com/office/drawing/2014/main" id="{EE17633E-85AB-4073-8EEF-7E44AD93D4EA}"/>
               </a:ext>
             </a:extLst>
           </p:cNvPr>
@@ -7893,7 +7893,7 @@
           <p:cNvPr id="4" name="">
             <a:extLst xmlns:a="http://schemas.openxmlformats.org/drawingml/2006/main">
               <a:ext uri="{FF2B5EF4-FFF2-40B4-BE49-F238E27FC236}">
-                <a16:creationId xmlns:a16="http://schemas.microsoft.com/office/drawing/2014/main" id="{0E8F3EBA-D5FA-4693-A006-B03AEB160632}"/>
+                <a16:creationId xmlns:a16="http://schemas.microsoft.com/office/drawing/2014/main" id="{2FC218EC-8409-49EE-9206-67559EAD0C28}"/>
               </a:ext>
             </a:extLst>
           </p:cNvPr>
@@ -7950,7 +7950,7 @@
           <p:cNvPr id="5" name="">
             <a:extLst xmlns:a="http://schemas.openxmlformats.org/drawingml/2006/main">
               <a:ext uri="{FF2B5EF4-FFF2-40B4-BE49-F238E27FC236}">
-                <a16:creationId xmlns:a16="http://schemas.microsoft.com/office/drawing/2014/main" id="{7B4EEF62-B8CF-4BC6-AA2E-29E97178F03C}"/>
+                <a16:creationId xmlns:a16="http://schemas.microsoft.com/office/drawing/2014/main" id="{81DAAE6B-69D6-45FC-AF5B-ADEDAE888476}"/>
               </a:ext>
             </a:extLst>
           </p:cNvPr>
@@ -8007,7 +8007,7 @@
           <p:cNvPr id="6" name="">
             <a:extLst xmlns:a="http://schemas.openxmlformats.org/drawingml/2006/main">
               <a:ext uri="{FF2B5EF4-FFF2-40B4-BE49-F238E27FC236}">
-                <a16:creationId xmlns:a16="http://schemas.microsoft.com/office/drawing/2014/main" id="{707AD2DC-E9CA-472D-A578-E8C45021C8AF}"/>
+                <a16:creationId xmlns:a16="http://schemas.microsoft.com/office/drawing/2014/main" id="{92D4E9C9-C183-414E-AEF4-CFAF9AF82826}"/>
               </a:ext>
             </a:extLst>
           </p:cNvPr>
@@ -8064,7 +8064,7 @@
           <p:cNvPr id="7" name="">
             <a:extLst xmlns:a="http://schemas.openxmlformats.org/drawingml/2006/main">
               <a:ext uri="{FF2B5EF4-FFF2-40B4-BE49-F238E27FC236}">
-                <a16:creationId xmlns:a16="http://schemas.microsoft.com/office/drawing/2014/main" id="{C0AF7A1C-0E24-4A26-ADCE-CC347DBA8824}"/>
+                <a16:creationId xmlns:a16="http://schemas.microsoft.com/office/drawing/2014/main" id="{37FB5CF6-C8E1-420E-B99D-A57267E46EA3}"/>
               </a:ext>
             </a:extLst>
           </p:cNvPr>
@@ -8096,7 +8096,7 @@
           <p:cNvPr id="8" name="">
             <a:extLst xmlns:a="http://schemas.openxmlformats.org/drawingml/2006/main">
               <a:ext uri="{FF2B5EF4-FFF2-40B4-BE49-F238E27FC236}">
-                <a16:creationId xmlns:a16="http://schemas.microsoft.com/office/drawing/2014/main" id="{ED3DA737-CBFB-4723-9E57-D1BB453246C8}"/>
+                <a16:creationId xmlns:a16="http://schemas.microsoft.com/office/drawing/2014/main" id="{B5CE5960-36CF-4EEA-B69E-511F41ACC9C9}"/>
               </a:ext>
             </a:extLst>
           </p:cNvPr>
@@ -8153,7 +8153,7 @@
           <p:cNvPr id="9" name="">
             <a:extLst xmlns:a="http://schemas.openxmlformats.org/drawingml/2006/main">
               <a:ext uri="{FF2B5EF4-FFF2-40B4-BE49-F238E27FC236}">
-                <a16:creationId xmlns:a16="http://schemas.microsoft.com/office/drawing/2014/main" id="{CAA4C4D5-2ABD-49E7-9FBF-CA4F6D0FC77E}"/>
+                <a16:creationId xmlns:a16="http://schemas.microsoft.com/office/drawing/2014/main" id="{558A219C-E42D-4D17-8B83-E2FDE6E23C3C}"/>
               </a:ext>
             </a:extLst>
           </p:cNvPr>
@@ -8210,19 +8210,19 @@
           <p:cNvPr id="10" name="">
             <a:extLst xmlns:a="http://schemas.openxmlformats.org/drawingml/2006/main">
               <a:ext uri="{FF2B5EF4-FFF2-40B4-BE49-F238E27FC236}">
-                <a16:creationId xmlns:a16="http://schemas.microsoft.com/office/drawing/2014/main" id="{45C64585-E0CC-4E14-A7F2-F97F0E000F7F}"/>
-              </a:ext>
-            </a:extLst>
-          </p:cNvPr>
-          <p:cNvSpPr>
-            <a:spLocks xmlns:a="http://schemas.openxmlformats.org/drawingml/2006/main" noGrp="1"/>
-          </p:cNvSpPr>
-          <p:nvPr/>
-        </p:nvSpPr>
-        <p:spPr>
-          <a:xfrm xmlns:a="http://schemas.openxmlformats.org/drawingml/2006/main">
-            <a:off x="914400" y="1257300"/>
-            <a:ext cx="10363200" cy="781050"/>
+                <a16:creationId xmlns:a16="http://schemas.microsoft.com/office/drawing/2014/main" id="{0451D29D-F66F-47DE-8843-20B521ACADBE}"/>
+              </a:ext>
+            </a:extLst>
+          </p:cNvPr>
+          <p:cNvSpPr>
+            <a:spLocks xmlns:a="http://schemas.openxmlformats.org/drawingml/2006/main" noGrp="1"/>
+          </p:cNvSpPr>
+          <p:nvPr/>
+        </p:nvSpPr>
+        <p:spPr>
+          <a:xfrm xmlns:a="http://schemas.openxmlformats.org/drawingml/2006/main">
+            <a:off x="857250" y="1219200"/>
+            <a:ext cx="10477500" cy="742950"/>
           </a:xfrm>
           <a:prstGeom xmlns:a="http://schemas.openxmlformats.org/drawingml/2006/main" prst="rect">
             <a:avLst/>
@@ -8239,7 +8239,7 @@
           <a:lstStyle xmlns:a="http://schemas.openxmlformats.org/drawingml/2006/main"/>
           <a:p xmlns:a="http://schemas.openxmlformats.org/drawingml/2006/main">
             <a:pPr algn="ctr">
-              <a:defRPr sz="2175" b="1">
+              <a:defRPr sz="2100" b="1">
                 <a:solidFill>
                   <a:srgbClr val="17253A"/>
                 </a:solidFill>
@@ -8249,7 +8249,7 @@
               </a:defRPr>
             </a:pPr>
             <a:r>
-              <a:rPr sz="2175" b="1">
+              <a:rPr sz="2100" b="1">
                 <a:solidFill>
                   <a:srgbClr val="17253A"/>
                 </a:solidFill>
@@ -8267,28 +8267,30 @@
           <p:cNvPr id="11" name="">
             <a:extLst xmlns:a="http://schemas.openxmlformats.org/drawingml/2006/main">
               <a:ext uri="{FF2B5EF4-FFF2-40B4-BE49-F238E27FC236}">
-                <a16:creationId xmlns:a16="http://schemas.microsoft.com/office/drawing/2014/main" id="{C900EC88-B69B-4471-B2F1-6FE268517FA0}"/>
-              </a:ext>
-            </a:extLst>
-          </p:cNvPr>
-          <p:cNvSpPr>
-            <a:spLocks xmlns:a="http://schemas.openxmlformats.org/drawingml/2006/main" noGrp="1"/>
-          </p:cNvSpPr>
-          <p:nvPr/>
-        </p:nvSpPr>
-        <p:spPr>
-          <a:xfrm xmlns:a="http://schemas.openxmlformats.org/drawingml/2006/main">
-            <a:off x="1000125" y="2247900"/>
-            <a:ext cx="476250" cy="476250"/>
-          </a:xfrm>
-          <a:prstGeom xmlns:a="http://schemas.openxmlformats.org/drawingml/2006/main" prst="ellipse">
+                <a16:creationId xmlns:a16="http://schemas.microsoft.com/office/drawing/2014/main" id="{FF34165C-3A14-49F1-83C2-82F1B5C2798F}"/>
+              </a:ext>
+            </a:extLst>
+          </p:cNvPr>
+          <p:cNvSpPr>
+            <a:spLocks xmlns:a="http://schemas.openxmlformats.org/drawingml/2006/main" noGrp="1"/>
+          </p:cNvSpPr>
+          <p:nvPr/>
+        </p:nvSpPr>
+        <p:spPr>
+          <a:xfrm xmlns:a="http://schemas.openxmlformats.org/drawingml/2006/main">
+            <a:off x="971550" y="2124075"/>
+            <a:ext cx="38100" cy="3524250"/>
+          </a:xfrm>
+          <a:prstGeom xmlns:a="http://schemas.openxmlformats.org/drawingml/2006/main" prst="rect">
             <a:avLst/>
           </a:prstGeom>
           <a:solidFill xmlns:a="http://schemas.openxmlformats.org/drawingml/2006/main">
-            <a:srgbClr val="18324A"/>
+            <a:srgbClr val="2C6E73"/>
           </a:solidFill>
           <a:ln xmlns:a="http://schemas.openxmlformats.org/drawingml/2006/main" w="0">
-            <a:noFill/>
+            <a:solidFill>
+              <a:srgbClr val="2C6E73"/>
+            </a:solidFill>
           </a:ln>
         </p:spPr>
       </p:sp>
@@ -8297,19 +8299,19 @@
           <p:cNvPr id="12" name="">
             <a:extLst xmlns:a="http://schemas.openxmlformats.org/drawingml/2006/main">
               <a:ext uri="{FF2B5EF4-FFF2-40B4-BE49-F238E27FC236}">
-                <a16:creationId xmlns:a16="http://schemas.microsoft.com/office/drawing/2014/main" id="{48BA5F81-3858-4A85-937F-640460CC48E9}"/>
-              </a:ext>
-            </a:extLst>
-          </p:cNvPr>
-          <p:cNvSpPr>
-            <a:spLocks xmlns:a="http://schemas.openxmlformats.org/drawingml/2006/main" noGrp="1"/>
-          </p:cNvSpPr>
-          <p:nvPr/>
-        </p:nvSpPr>
-        <p:spPr>
-          <a:xfrm xmlns:a="http://schemas.openxmlformats.org/drawingml/2006/main">
-            <a:off x="1000125" y="2276475"/>
-            <a:ext cx="476250" cy="419100"/>
+                <a16:creationId xmlns:a16="http://schemas.microsoft.com/office/drawing/2014/main" id="{A7730F24-3554-4A08-8F1B-A9F268677BF1}"/>
+              </a:ext>
+            </a:extLst>
+          </p:cNvPr>
+          <p:cNvSpPr>
+            <a:spLocks xmlns:a="http://schemas.openxmlformats.org/drawingml/2006/main" noGrp="1"/>
+          </p:cNvSpPr>
+          <p:nvPr/>
+        </p:nvSpPr>
+        <p:spPr>
+          <a:xfrm xmlns:a="http://schemas.openxmlformats.org/drawingml/2006/main">
+            <a:off x="1162050" y="2200275"/>
+            <a:ext cx="400050" cy="400050"/>
           </a:xfrm>
           <a:prstGeom xmlns:a="http://schemas.openxmlformats.org/drawingml/2006/main" prst="rect">
             <a:avLst/>
@@ -8326,9 +8328,9 @@
           <a:lstStyle xmlns:a="http://schemas.openxmlformats.org/drawingml/2006/main"/>
           <a:p xmlns:a="http://schemas.openxmlformats.org/drawingml/2006/main">
             <a:pPr algn="ctr">
-              <a:defRPr sz="1350" b="1">
-                <a:solidFill>
-                  <a:srgbClr val="FFFFFF"/>
+              <a:defRPr sz="1125" b="1">
+                <a:solidFill>
+                  <a:srgbClr val="2C6E73"/>
                 </a:solidFill>
                 <a:latin typeface="Arial"/>
                 <a:ea typeface="Arial"/>
@@ -8336,9 +8338,9 @@
               </a:defRPr>
             </a:pPr>
             <a:r>
-              <a:rPr sz="1350" b="1">
-                <a:solidFill>
-                  <a:srgbClr val="FFFFFF"/>
+              <a:rPr sz="1125" b="1">
+                <a:solidFill>
+                  <a:srgbClr val="2C6E73"/>
                 </a:solidFill>
                 <a:latin typeface="Arial"/>
                 <a:ea typeface="Arial"/>
@@ -8354,19 +8356,19 @@
           <p:cNvPr id="13" name="">
             <a:extLst xmlns:a="http://schemas.openxmlformats.org/drawingml/2006/main">
               <a:ext uri="{FF2B5EF4-FFF2-40B4-BE49-F238E27FC236}">
-                <a16:creationId xmlns:a16="http://schemas.microsoft.com/office/drawing/2014/main" id="{3E7EF53D-9991-410E-92AD-111BD1E0EAEE}"/>
-              </a:ext>
-            </a:extLst>
-          </p:cNvPr>
-          <p:cNvSpPr>
-            <a:spLocks xmlns:a="http://schemas.openxmlformats.org/drawingml/2006/main" noGrp="1"/>
-          </p:cNvSpPr>
-          <p:nvPr/>
-        </p:nvSpPr>
-        <p:spPr>
-          <a:xfrm xmlns:a="http://schemas.openxmlformats.org/drawingml/2006/main">
-            <a:off x="1714500" y="2181225"/>
-            <a:ext cx="9429750" cy="609600"/>
+                <a16:creationId xmlns:a16="http://schemas.microsoft.com/office/drawing/2014/main" id="{11A79E4F-9D40-46AC-B263-3AB2E4F35392}"/>
+              </a:ext>
+            </a:extLst>
+          </p:cNvPr>
+          <p:cNvSpPr>
+            <a:spLocks xmlns:a="http://schemas.openxmlformats.org/drawingml/2006/main" noGrp="1"/>
+          </p:cNvSpPr>
+          <p:nvPr/>
+        </p:nvSpPr>
+        <p:spPr>
+          <a:xfrm xmlns:a="http://schemas.openxmlformats.org/drawingml/2006/main">
+            <a:off x="1714500" y="2114550"/>
+            <a:ext cx="9525000" cy="809625"/>
           </a:xfrm>
           <a:prstGeom xmlns:a="http://schemas.openxmlformats.org/drawingml/2006/main" prst="rect">
             <a:avLst/>
@@ -8383,7 +8385,7 @@
           <a:lstStyle xmlns:a="http://schemas.openxmlformats.org/drawingml/2006/main"/>
           <a:p xmlns:a="http://schemas.openxmlformats.org/drawingml/2006/main">
             <a:pPr algn="l">
-              <a:defRPr sz="1500" b="0">
+              <a:defRPr sz="1725" b="0">
                 <a:solidFill>
                   <a:srgbClr val="17253A"/>
                 </a:solidFill>
@@ -8393,7 +8395,7 @@
               </a:defRPr>
             </a:pPr>
             <a:r>
-              <a:rPr sz="1500" b="0">
+              <a:rPr sz="1725" b="0">
                 <a:solidFill>
                   <a:srgbClr val="17253A"/>
                 </a:solidFill>
@@ -8401,7 +8403,7 @@
                 <a:ea typeface="Arial"/>
                 <a:cs typeface="Arial"/>
               </a:rPr>
-              <a:t>Identify the structure: Identify brackets and multiplication or division before calculating.</a:t>
+              <a:t>48 - 6 × 5</a:t>
             </a:r>
           </a:p>
         </p:txBody>
@@ -8411,28 +8413,30 @@
           <p:cNvPr id="14" name="">
             <a:extLst xmlns:a="http://schemas.openxmlformats.org/drawingml/2006/main">
               <a:ext uri="{FF2B5EF4-FFF2-40B4-BE49-F238E27FC236}">
-                <a16:creationId xmlns:a16="http://schemas.microsoft.com/office/drawing/2014/main" id="{ECDE66E0-CEB8-424D-AFEE-45C8E7D1CD18}"/>
-              </a:ext>
-            </a:extLst>
-          </p:cNvPr>
-          <p:cNvSpPr>
-            <a:spLocks xmlns:a="http://schemas.openxmlformats.org/drawingml/2006/main" noGrp="1"/>
-          </p:cNvSpPr>
-          <p:nvPr/>
-        </p:nvSpPr>
-        <p:spPr>
-          <a:xfrm xmlns:a="http://schemas.openxmlformats.org/drawingml/2006/main">
-            <a:off x="1000125" y="2990850"/>
-            <a:ext cx="476250" cy="476250"/>
-          </a:xfrm>
-          <a:prstGeom xmlns:a="http://schemas.openxmlformats.org/drawingml/2006/main" prst="ellipse">
+                <a16:creationId xmlns:a16="http://schemas.microsoft.com/office/drawing/2014/main" id="{2D663289-CBFD-4AD4-BFEF-8A5E33A21523}"/>
+              </a:ext>
+            </a:extLst>
+          </p:cNvPr>
+          <p:cNvSpPr>
+            <a:spLocks xmlns:a="http://schemas.openxmlformats.org/drawingml/2006/main" noGrp="1"/>
+          </p:cNvSpPr>
+          <p:nvPr/>
+        </p:nvSpPr>
+        <p:spPr>
+          <a:xfrm xmlns:a="http://schemas.openxmlformats.org/drawingml/2006/main">
+            <a:off x="1714500" y="2943225"/>
+            <a:ext cx="9334500" cy="9525"/>
+          </a:xfrm>
+          <a:prstGeom xmlns:a="http://schemas.openxmlformats.org/drawingml/2006/main" prst="rect">
             <a:avLst/>
           </a:prstGeom>
           <a:solidFill xmlns:a="http://schemas.openxmlformats.org/drawingml/2006/main">
-            <a:srgbClr val="2C6E73"/>
+            <a:srgbClr val="D9E0E6"/>
           </a:solidFill>
           <a:ln xmlns:a="http://schemas.openxmlformats.org/drawingml/2006/main" w="0">
-            <a:noFill/>
+            <a:solidFill>
+              <a:srgbClr val="D9E0E6"/>
+            </a:solidFill>
           </a:ln>
         </p:spPr>
       </p:sp>
@@ -8441,19 +8445,19 @@
           <p:cNvPr id="15" name="">
             <a:extLst xmlns:a="http://schemas.openxmlformats.org/drawingml/2006/main">
               <a:ext uri="{FF2B5EF4-FFF2-40B4-BE49-F238E27FC236}">
-                <a16:creationId xmlns:a16="http://schemas.microsoft.com/office/drawing/2014/main" id="{BBD70893-6DE5-4DC2-B740-DBE9EE0F2789}"/>
-              </a:ext>
-            </a:extLst>
-          </p:cNvPr>
-          <p:cNvSpPr>
-            <a:spLocks xmlns:a="http://schemas.openxmlformats.org/drawingml/2006/main" noGrp="1"/>
-          </p:cNvSpPr>
-          <p:nvPr/>
-        </p:nvSpPr>
-        <p:spPr>
-          <a:xfrm xmlns:a="http://schemas.openxmlformats.org/drawingml/2006/main">
-            <a:off x="1000125" y="3019425"/>
-            <a:ext cx="476250" cy="419100"/>
+                <a16:creationId xmlns:a16="http://schemas.microsoft.com/office/drawing/2014/main" id="{A8177E49-AB2C-41DC-88FD-6FBD3B14086E}"/>
+              </a:ext>
+            </a:extLst>
+          </p:cNvPr>
+          <p:cNvSpPr>
+            <a:spLocks xmlns:a="http://schemas.openxmlformats.org/drawingml/2006/main" noGrp="1"/>
+          </p:cNvSpPr>
+          <p:nvPr/>
+        </p:nvSpPr>
+        <p:spPr>
+          <a:xfrm xmlns:a="http://schemas.openxmlformats.org/drawingml/2006/main">
+            <a:off x="1162050" y="3076575"/>
+            <a:ext cx="400050" cy="400050"/>
           </a:xfrm>
           <a:prstGeom xmlns:a="http://schemas.openxmlformats.org/drawingml/2006/main" prst="rect">
             <a:avLst/>
@@ -8470,9 +8474,9 @@
           <a:lstStyle xmlns:a="http://schemas.openxmlformats.org/drawingml/2006/main"/>
           <a:p xmlns:a="http://schemas.openxmlformats.org/drawingml/2006/main">
             <a:pPr algn="ctr">
-              <a:defRPr sz="1350" b="1">
-                <a:solidFill>
-                  <a:srgbClr val="FFFFFF"/>
+              <a:defRPr sz="1125" b="1">
+                <a:solidFill>
+                  <a:srgbClr val="2C6E73"/>
                 </a:solidFill>
                 <a:latin typeface="Arial"/>
                 <a:ea typeface="Arial"/>
@@ -8480,9 +8484,9 @@
               </a:defRPr>
             </a:pPr>
             <a:r>
-              <a:rPr sz="1350" b="1">
-                <a:solidFill>
-                  <a:srgbClr val="FFFFFF"/>
+              <a:rPr sz="1125" b="1">
+                <a:solidFill>
+                  <a:srgbClr val="2C6E73"/>
                 </a:solidFill>
                 <a:latin typeface="Arial"/>
                 <a:ea typeface="Arial"/>
@@ -8498,19 +8502,19 @@
           <p:cNvPr id="16" name="">
             <a:extLst xmlns:a="http://schemas.openxmlformats.org/drawingml/2006/main">
               <a:ext uri="{FF2B5EF4-FFF2-40B4-BE49-F238E27FC236}">
-                <a16:creationId xmlns:a16="http://schemas.microsoft.com/office/drawing/2014/main" id="{C4DABA5A-7EF7-430A-87C9-CD1884A5B97E}"/>
-              </a:ext>
-            </a:extLst>
-          </p:cNvPr>
-          <p:cNvSpPr>
-            <a:spLocks xmlns:a="http://schemas.openxmlformats.org/drawingml/2006/main" noGrp="1"/>
-          </p:cNvSpPr>
-          <p:nvPr/>
-        </p:nvSpPr>
-        <p:spPr>
-          <a:xfrm xmlns:a="http://schemas.openxmlformats.org/drawingml/2006/main">
-            <a:off x="1714500" y="2924175"/>
-            <a:ext cx="9429750" cy="609600"/>
+                <a16:creationId xmlns:a16="http://schemas.microsoft.com/office/drawing/2014/main" id="{51E1B54E-25BE-4EAD-8BA8-E44C500BE1DD}"/>
+              </a:ext>
+            </a:extLst>
+          </p:cNvPr>
+          <p:cNvSpPr>
+            <a:spLocks xmlns:a="http://schemas.openxmlformats.org/drawingml/2006/main" noGrp="1"/>
+          </p:cNvSpPr>
+          <p:nvPr/>
+        </p:nvSpPr>
+        <p:spPr>
+          <a:xfrm xmlns:a="http://schemas.openxmlformats.org/drawingml/2006/main">
+            <a:off x="1714500" y="2990850"/>
+            <a:ext cx="9525000" cy="809625"/>
           </a:xfrm>
           <a:prstGeom xmlns:a="http://schemas.openxmlformats.org/drawingml/2006/main" prst="rect">
             <a:avLst/>
@@ -8527,7 +8531,7 @@
           <a:lstStyle xmlns:a="http://schemas.openxmlformats.org/drawingml/2006/main"/>
           <a:p xmlns:a="http://schemas.openxmlformats.org/drawingml/2006/main">
             <a:pPr algn="l">
-              <a:defRPr sz="1500" b="0">
+              <a:defRPr sz="1725" b="0">
                 <a:solidFill>
                   <a:srgbClr val="17253A"/>
                 </a:solidFill>
@@ -8537,7 +8541,7 @@
               </a:defRPr>
             </a:pPr>
             <a:r>
-              <a:rPr sz="1500" b="0">
+              <a:rPr sz="1725" b="0">
                 <a:solidFill>
                   <a:srgbClr val="17253A"/>
                 </a:solidFill>
@@ -8545,7 +8549,7 @@
                 <a:ea typeface="Arial"/>
                 <a:cs typeface="Arial"/>
               </a:rPr>
-              <a:t>Set up the method: Work through operations of equal priority from left to right.</a:t>
+              <a:t>Multiplication comes before subtraction</a:t>
             </a:r>
           </a:p>
         </p:txBody>
@@ -8555,28 +8559,30 @@
           <p:cNvPr id="17" name="">
             <a:extLst xmlns:a="http://schemas.openxmlformats.org/drawingml/2006/main">
               <a:ext uri="{FF2B5EF4-FFF2-40B4-BE49-F238E27FC236}">
-                <a16:creationId xmlns:a16="http://schemas.microsoft.com/office/drawing/2014/main" id="{A7473591-CDCE-48BE-9926-D4E9983DB094}"/>
-              </a:ext>
-            </a:extLst>
-          </p:cNvPr>
-          <p:cNvSpPr>
-            <a:spLocks xmlns:a="http://schemas.openxmlformats.org/drawingml/2006/main" noGrp="1"/>
-          </p:cNvSpPr>
-          <p:nvPr/>
-        </p:nvSpPr>
-        <p:spPr>
-          <a:xfrm xmlns:a="http://schemas.openxmlformats.org/drawingml/2006/main">
-            <a:off x="1000125" y="3733800"/>
-            <a:ext cx="476250" cy="476250"/>
-          </a:xfrm>
-          <a:prstGeom xmlns:a="http://schemas.openxmlformats.org/drawingml/2006/main" prst="ellipse">
+                <a16:creationId xmlns:a16="http://schemas.microsoft.com/office/drawing/2014/main" id="{4E218FEF-15D4-460E-86F2-0A322756F432}"/>
+              </a:ext>
+            </a:extLst>
+          </p:cNvPr>
+          <p:cNvSpPr>
+            <a:spLocks xmlns:a="http://schemas.openxmlformats.org/drawingml/2006/main" noGrp="1"/>
+          </p:cNvSpPr>
+          <p:nvPr/>
+        </p:nvSpPr>
+        <p:spPr>
+          <a:xfrm xmlns:a="http://schemas.openxmlformats.org/drawingml/2006/main">
+            <a:off x="1714500" y="3819525"/>
+            <a:ext cx="9334500" cy="9525"/>
+          </a:xfrm>
+          <a:prstGeom xmlns:a="http://schemas.openxmlformats.org/drawingml/2006/main" prst="rect">
             <a:avLst/>
           </a:prstGeom>
           <a:solidFill xmlns:a="http://schemas.openxmlformats.org/drawingml/2006/main">
-            <a:srgbClr val="2C6E73"/>
+            <a:srgbClr val="D9E0E6"/>
           </a:solidFill>
           <a:ln xmlns:a="http://schemas.openxmlformats.org/drawingml/2006/main" w="0">
-            <a:noFill/>
+            <a:solidFill>
+              <a:srgbClr val="D9E0E6"/>
+            </a:solidFill>
           </a:ln>
         </p:spPr>
       </p:sp>
@@ -8585,19 +8591,19 @@
           <p:cNvPr id="18" name="">
             <a:extLst xmlns:a="http://schemas.openxmlformats.org/drawingml/2006/main">
               <a:ext uri="{FF2B5EF4-FFF2-40B4-BE49-F238E27FC236}">
-                <a16:creationId xmlns:a16="http://schemas.microsoft.com/office/drawing/2014/main" id="{AADD7967-D4C8-4535-B904-0AE35496A45B}"/>
-              </a:ext>
-            </a:extLst>
-          </p:cNvPr>
-          <p:cNvSpPr>
-            <a:spLocks xmlns:a="http://schemas.openxmlformats.org/drawingml/2006/main" noGrp="1"/>
-          </p:cNvSpPr>
-          <p:nvPr/>
-        </p:nvSpPr>
-        <p:spPr>
-          <a:xfrm xmlns:a="http://schemas.openxmlformats.org/drawingml/2006/main">
-            <a:off x="1000125" y="3762375"/>
-            <a:ext cx="476250" cy="419100"/>
+                <a16:creationId xmlns:a16="http://schemas.microsoft.com/office/drawing/2014/main" id="{85065004-2896-4D55-B1B6-C167C4ED8C30}"/>
+              </a:ext>
+            </a:extLst>
+          </p:cNvPr>
+          <p:cNvSpPr>
+            <a:spLocks xmlns:a="http://schemas.openxmlformats.org/drawingml/2006/main" noGrp="1"/>
+          </p:cNvSpPr>
+          <p:nvPr/>
+        </p:nvSpPr>
+        <p:spPr>
+          <a:xfrm xmlns:a="http://schemas.openxmlformats.org/drawingml/2006/main">
+            <a:off x="1162050" y="3952875"/>
+            <a:ext cx="400050" cy="400050"/>
           </a:xfrm>
           <a:prstGeom xmlns:a="http://schemas.openxmlformats.org/drawingml/2006/main" prst="rect">
             <a:avLst/>
@@ -8614,9 +8620,9 @@
           <a:lstStyle xmlns:a="http://schemas.openxmlformats.org/drawingml/2006/main"/>
           <a:p xmlns:a="http://schemas.openxmlformats.org/drawingml/2006/main">
             <a:pPr algn="ctr">
-              <a:defRPr sz="1350" b="1">
-                <a:solidFill>
-                  <a:srgbClr val="FFFFFF"/>
+              <a:defRPr sz="1125" b="1">
+                <a:solidFill>
+                  <a:srgbClr val="2C6E73"/>
                 </a:solidFill>
                 <a:latin typeface="Arial"/>
                 <a:ea typeface="Arial"/>
@@ -8624,9 +8630,9 @@
               </a:defRPr>
             </a:pPr>
             <a:r>
-              <a:rPr sz="1350" b="1">
-                <a:solidFill>
-                  <a:srgbClr val="FFFFFF"/>
+              <a:rPr sz="1125" b="1">
+                <a:solidFill>
+                  <a:srgbClr val="2C6E73"/>
                 </a:solidFill>
                 <a:latin typeface="Arial"/>
                 <a:ea typeface="Arial"/>
@@ -8642,19 +8648,19 @@
           <p:cNvPr id="19" name="">
             <a:extLst xmlns:a="http://schemas.openxmlformats.org/drawingml/2006/main">
               <a:ext uri="{FF2B5EF4-FFF2-40B4-BE49-F238E27FC236}">
-                <a16:creationId xmlns:a16="http://schemas.microsoft.com/office/drawing/2014/main" id="{F5DCF486-E4DF-46CC-AB95-05FB2F614B4C}"/>
-              </a:ext>
-            </a:extLst>
-          </p:cNvPr>
-          <p:cNvSpPr>
-            <a:spLocks xmlns:a="http://schemas.openxmlformats.org/drawingml/2006/main" noGrp="1"/>
-          </p:cNvSpPr>
-          <p:nvPr/>
-        </p:nvSpPr>
-        <p:spPr>
-          <a:xfrm xmlns:a="http://schemas.openxmlformats.org/drawingml/2006/main">
-            <a:off x="1714500" y="3667125"/>
-            <a:ext cx="9429750" cy="609600"/>
+                <a16:creationId xmlns:a16="http://schemas.microsoft.com/office/drawing/2014/main" id="{B632D579-C0AB-4572-BFB9-572CFC79C831}"/>
+              </a:ext>
+            </a:extLst>
+          </p:cNvPr>
+          <p:cNvSpPr>
+            <a:spLocks xmlns:a="http://schemas.openxmlformats.org/drawingml/2006/main" noGrp="1"/>
+          </p:cNvSpPr>
+          <p:nvPr/>
+        </p:nvSpPr>
+        <p:spPr>
+          <a:xfrm xmlns:a="http://schemas.openxmlformats.org/drawingml/2006/main">
+            <a:off x="1714500" y="3867150"/>
+            <a:ext cx="9525000" cy="809625"/>
           </a:xfrm>
           <a:prstGeom xmlns:a="http://schemas.openxmlformats.org/drawingml/2006/main" prst="rect">
             <a:avLst/>
@@ -8671,7 +8677,7 @@
           <a:lstStyle xmlns:a="http://schemas.openxmlformats.org/drawingml/2006/main"/>
           <a:p xmlns:a="http://schemas.openxmlformats.org/drawingml/2006/main">
             <a:pPr algn="l">
-              <a:defRPr sz="1500" b="0">
+              <a:defRPr sz="1725" b="0">
                 <a:solidFill>
                   <a:srgbClr val="17253A"/>
                 </a:solidFill>
@@ -8681,7 +8687,7 @@
               </a:defRPr>
             </a:pPr>
             <a:r>
-              <a:rPr sz="1500" b="0">
+              <a:rPr sz="1725" b="0">
                 <a:solidFill>
                   <a:srgbClr val="17253A"/>
                 </a:solidFill>
@@ -8689,7 +8695,7 @@
                 <a:ea typeface="Arial"/>
                 <a:cs typeface="Arial"/>
               </a:rPr>
-              <a:t>Complete the calculation: Multiply 6 by 5, then subtract the product from 48.</a:t>
+              <a:t>6 × 5 = 30</a:t>
             </a:r>
           </a:p>
         </p:txBody>
@@ -8699,28 +8705,30 @@
           <p:cNvPr id="20" name="">
             <a:extLst xmlns:a="http://schemas.openxmlformats.org/drawingml/2006/main">
               <a:ext uri="{FF2B5EF4-FFF2-40B4-BE49-F238E27FC236}">
-                <a16:creationId xmlns:a16="http://schemas.microsoft.com/office/drawing/2014/main" id="{6F253A2E-5BDF-4601-8C5D-32F03A891D84}"/>
-              </a:ext>
-            </a:extLst>
-          </p:cNvPr>
-          <p:cNvSpPr>
-            <a:spLocks xmlns:a="http://schemas.openxmlformats.org/drawingml/2006/main" noGrp="1"/>
-          </p:cNvSpPr>
-          <p:nvPr/>
-        </p:nvSpPr>
-        <p:spPr>
-          <a:xfrm xmlns:a="http://schemas.openxmlformats.org/drawingml/2006/main">
-            <a:off x="1000125" y="4476750"/>
-            <a:ext cx="476250" cy="476250"/>
-          </a:xfrm>
-          <a:prstGeom xmlns:a="http://schemas.openxmlformats.org/drawingml/2006/main" prst="ellipse">
+                <a16:creationId xmlns:a16="http://schemas.microsoft.com/office/drawing/2014/main" id="{86DFF773-BAF4-4FE0-B8ED-22D2C439E660}"/>
+              </a:ext>
+            </a:extLst>
+          </p:cNvPr>
+          <p:cNvSpPr>
+            <a:spLocks xmlns:a="http://schemas.openxmlformats.org/drawingml/2006/main" noGrp="1"/>
+          </p:cNvSpPr>
+          <p:nvPr/>
+        </p:nvSpPr>
+        <p:spPr>
+          <a:xfrm xmlns:a="http://schemas.openxmlformats.org/drawingml/2006/main">
+            <a:off x="1714500" y="4695825"/>
+            <a:ext cx="9334500" cy="9525"/>
+          </a:xfrm>
+          <a:prstGeom xmlns:a="http://schemas.openxmlformats.org/drawingml/2006/main" prst="rect">
             <a:avLst/>
           </a:prstGeom>
           <a:solidFill xmlns:a="http://schemas.openxmlformats.org/drawingml/2006/main">
-            <a:srgbClr val="2C6E73"/>
+            <a:srgbClr val="D9E0E6"/>
           </a:solidFill>
           <a:ln xmlns:a="http://schemas.openxmlformats.org/drawingml/2006/main" w="0">
-            <a:noFill/>
+            <a:solidFill>
+              <a:srgbClr val="D9E0E6"/>
+            </a:solidFill>
           </a:ln>
         </p:spPr>
       </p:sp>
@@ -8729,19 +8737,19 @@
           <p:cNvPr id="21" name="">
             <a:extLst xmlns:a="http://schemas.openxmlformats.org/drawingml/2006/main">
               <a:ext uri="{FF2B5EF4-FFF2-40B4-BE49-F238E27FC236}">
-                <a16:creationId xmlns:a16="http://schemas.microsoft.com/office/drawing/2014/main" id="{FDEEA2A7-8C2C-4086-B4FF-FA94C044278C}"/>
-              </a:ext>
-            </a:extLst>
-          </p:cNvPr>
-          <p:cNvSpPr>
-            <a:spLocks xmlns:a="http://schemas.openxmlformats.org/drawingml/2006/main" noGrp="1"/>
-          </p:cNvSpPr>
-          <p:nvPr/>
-        </p:nvSpPr>
-        <p:spPr>
-          <a:xfrm xmlns:a="http://schemas.openxmlformats.org/drawingml/2006/main">
-            <a:off x="1000125" y="4505325"/>
-            <a:ext cx="476250" cy="419100"/>
+                <a16:creationId xmlns:a16="http://schemas.microsoft.com/office/drawing/2014/main" id="{C13291E3-FF7E-4BFE-8D77-390B194E481C}"/>
+              </a:ext>
+            </a:extLst>
+          </p:cNvPr>
+          <p:cNvSpPr>
+            <a:spLocks xmlns:a="http://schemas.openxmlformats.org/drawingml/2006/main" noGrp="1"/>
+          </p:cNvSpPr>
+          <p:nvPr/>
+        </p:nvSpPr>
+        <p:spPr>
+          <a:xfrm xmlns:a="http://schemas.openxmlformats.org/drawingml/2006/main">
+            <a:off x="1162050" y="4829175"/>
+            <a:ext cx="400050" cy="400050"/>
           </a:xfrm>
           <a:prstGeom xmlns:a="http://schemas.openxmlformats.org/drawingml/2006/main" prst="rect">
             <a:avLst/>
@@ -8758,9 +8766,9 @@
           <a:lstStyle xmlns:a="http://schemas.openxmlformats.org/drawingml/2006/main"/>
           <a:p xmlns:a="http://schemas.openxmlformats.org/drawingml/2006/main">
             <a:pPr algn="ctr">
-              <a:defRPr sz="1350" b="1">
-                <a:solidFill>
-                  <a:srgbClr val="FFFFFF"/>
+              <a:defRPr sz="1125" b="1">
+                <a:solidFill>
+                  <a:srgbClr val="2F785D"/>
                 </a:solidFill>
                 <a:latin typeface="Arial"/>
                 <a:ea typeface="Arial"/>
@@ -8768,9 +8776,9 @@
               </a:defRPr>
             </a:pPr>
             <a:r>
-              <a:rPr sz="1350" b="1">
-                <a:solidFill>
-                  <a:srgbClr val="FFFFFF"/>
+              <a:rPr sz="1125" b="1">
+                <a:solidFill>
+                  <a:srgbClr val="2F785D"/>
                 </a:solidFill>
                 <a:latin typeface="Arial"/>
                 <a:ea typeface="Arial"/>
@@ -8786,19 +8794,19 @@
           <p:cNvPr id="22" name="">
             <a:extLst xmlns:a="http://schemas.openxmlformats.org/drawingml/2006/main">
               <a:ext uri="{FF2B5EF4-FFF2-40B4-BE49-F238E27FC236}">
-                <a16:creationId xmlns:a16="http://schemas.microsoft.com/office/drawing/2014/main" id="{671267A7-130E-4959-8D56-1E33BA89082C}"/>
-              </a:ext>
-            </a:extLst>
-          </p:cNvPr>
-          <p:cNvSpPr>
-            <a:spLocks xmlns:a="http://schemas.openxmlformats.org/drawingml/2006/main" noGrp="1"/>
-          </p:cNvSpPr>
-          <p:nvPr/>
-        </p:nvSpPr>
-        <p:spPr>
-          <a:xfrm xmlns:a="http://schemas.openxmlformats.org/drawingml/2006/main">
-            <a:off x="1714500" y="4410075"/>
-            <a:ext cx="9429750" cy="609600"/>
+                <a16:creationId xmlns:a16="http://schemas.microsoft.com/office/drawing/2014/main" id="{6CFB6E59-C3A8-4229-A03C-38DF717A0E7D}"/>
+              </a:ext>
+            </a:extLst>
+          </p:cNvPr>
+          <p:cNvSpPr>
+            <a:spLocks xmlns:a="http://schemas.openxmlformats.org/drawingml/2006/main" noGrp="1"/>
+          </p:cNvSpPr>
+          <p:nvPr/>
+        </p:nvSpPr>
+        <p:spPr>
+          <a:xfrm xmlns:a="http://schemas.openxmlformats.org/drawingml/2006/main">
+            <a:off x="1714500" y="4743450"/>
+            <a:ext cx="9525000" cy="809625"/>
           </a:xfrm>
           <a:prstGeom xmlns:a="http://schemas.openxmlformats.org/drawingml/2006/main" prst="rect">
             <a:avLst/>
@@ -8815,7 +8823,7 @@
           <a:lstStyle xmlns:a="http://schemas.openxmlformats.org/drawingml/2006/main"/>
           <a:p xmlns:a="http://schemas.openxmlformats.org/drawingml/2006/main">
             <a:pPr algn="l">
-              <a:defRPr sz="1500" b="1">
+              <a:defRPr sz="1725" b="1">
                 <a:solidFill>
                   <a:srgbClr val="2F785D"/>
                 </a:solidFill>
@@ -8825,7 +8833,7 @@
               </a:defRPr>
             </a:pPr>
             <a:r>
-              <a:rPr sz="1500" b="1">
+              <a:rPr sz="1725" b="1">
                 <a:solidFill>
                   <a:srgbClr val="2F785D"/>
                 </a:solidFill>
@@ -8833,7 +8841,7 @@
                 <a:ea typeface="Arial"/>
                 <a:cs typeface="Arial"/>
               </a:rPr>
-              <a:t>Check the result: Check by estimating or comparing with an equivalent expression.</a:t>
+              <a:t>Then calculate 48 - 30</a:t>
             </a:r>
           </a:p>
         </p:txBody>
@@ -8841,7 +8849,7 @@
     </p:spTree>
     <p:extLst>
       <p:ext uri="{BB962C8B-B14F-4D97-AF65-F5344CB8AC3E}">
-        <p14:creationId xmlns:p14="http://schemas.microsoft.com/office/powerpoint/2010/main" val="1591856734"/>
+        <p14:creationId xmlns:p14="http://schemas.microsoft.com/office/powerpoint/2010/main" val="2035409871"/>
       </p:ext>
     </p:extLst>
   </p:cSld>
@@ -9134,7 +9142,7 @@
           <p:cNvPr id="15" name="">
             <a:extLst xmlns:a="http://schemas.openxmlformats.org/drawingml/2006/main">
               <a:ext uri="{FF2B5EF4-FFF2-40B4-BE49-F238E27FC236}">
-                <a16:creationId xmlns:a16="http://schemas.microsoft.com/office/drawing/2014/main" id="{5C82C33D-2D8C-4476-806C-D288B1ACC4A5}"/>
+                <a16:creationId xmlns:a16="http://schemas.microsoft.com/office/drawing/2014/main" id="{E9E2A586-8E3C-44DB-8216-683C54A7FBBC}"/>
               </a:ext>
             </a:extLst>
           </p:cNvPr>
@@ -9166,7 +9174,7 @@
           <p:cNvPr id="2" name="">
             <a:extLst xmlns:a="http://schemas.openxmlformats.org/drawingml/2006/main">
               <a:ext uri="{FF2B5EF4-FFF2-40B4-BE49-F238E27FC236}">
-                <a16:creationId xmlns:a16="http://schemas.microsoft.com/office/drawing/2014/main" id="{7A69C641-BFA9-4F61-A776-B22996B080D7}"/>
+                <a16:creationId xmlns:a16="http://schemas.microsoft.com/office/drawing/2014/main" id="{0375F311-83A5-4BDE-AC32-108154B2A275}"/>
               </a:ext>
             </a:extLst>
           </p:cNvPr>
@@ -9223,7 +9231,7 @@
           <p:cNvPr id="3" name="">
             <a:extLst xmlns:a="http://schemas.openxmlformats.org/drawingml/2006/main">
               <a:ext uri="{FF2B5EF4-FFF2-40B4-BE49-F238E27FC236}">
-                <a16:creationId xmlns:a16="http://schemas.microsoft.com/office/drawing/2014/main" id="{AD4F10DF-F21A-44F3-BE21-FC837019FF44}"/>
+                <a16:creationId xmlns:a16="http://schemas.microsoft.com/office/drawing/2014/main" id="{FCB3A676-9CCC-48CC-B18F-2A49723F6F05}"/>
               </a:ext>
             </a:extLst>
           </p:cNvPr>
@@ -9255,7 +9263,7 @@
           <p:cNvPr id="4" name="">
             <a:extLst xmlns:a="http://schemas.openxmlformats.org/drawingml/2006/main">
               <a:ext uri="{FF2B5EF4-FFF2-40B4-BE49-F238E27FC236}">
-                <a16:creationId xmlns:a16="http://schemas.microsoft.com/office/drawing/2014/main" id="{BF55723E-2A39-42EF-A638-F5CFE0E0105E}"/>
+                <a16:creationId xmlns:a16="http://schemas.microsoft.com/office/drawing/2014/main" id="{E3DA8000-BD77-4AD5-9D0F-E2F256773CB8}"/>
               </a:ext>
             </a:extLst>
           </p:cNvPr>
@@ -9312,7 +9320,7 @@
           <p:cNvPr id="5" name="">
             <a:extLst xmlns:a="http://schemas.openxmlformats.org/drawingml/2006/main">
               <a:ext uri="{FF2B5EF4-FFF2-40B4-BE49-F238E27FC236}">
-                <a16:creationId xmlns:a16="http://schemas.microsoft.com/office/drawing/2014/main" id="{856C9F91-6DA0-461F-9F80-0859A49A32C1}"/>
+                <a16:creationId xmlns:a16="http://schemas.microsoft.com/office/drawing/2014/main" id="{7824D847-8B72-41EF-A1E3-75A0FA056EC9}"/>
               </a:ext>
             </a:extLst>
           </p:cNvPr>
@@ -9369,7 +9377,7 @@
           <p:cNvPr id="6" name="">
             <a:extLst xmlns:a="http://schemas.openxmlformats.org/drawingml/2006/main">
               <a:ext uri="{FF2B5EF4-FFF2-40B4-BE49-F238E27FC236}">
-                <a16:creationId xmlns:a16="http://schemas.microsoft.com/office/drawing/2014/main" id="{08A29C70-C79A-4D55-9D40-DDF819BA6C5C}"/>
+                <a16:creationId xmlns:a16="http://schemas.microsoft.com/office/drawing/2014/main" id="{9DC38D55-E06A-4E18-A659-96EAE396F127}"/>
               </a:ext>
             </a:extLst>
           </p:cNvPr>
@@ -9426,7 +9434,7 @@
           <p:cNvPr id="7" name="">
             <a:extLst xmlns:a="http://schemas.openxmlformats.org/drawingml/2006/main">
               <a:ext uri="{FF2B5EF4-FFF2-40B4-BE49-F238E27FC236}">
-                <a16:creationId xmlns:a16="http://schemas.microsoft.com/office/drawing/2014/main" id="{0CABBC6B-4AD4-493C-86AB-8FD0BDC40F11}"/>
+                <a16:creationId xmlns:a16="http://schemas.microsoft.com/office/drawing/2014/main" id="{AFA239B0-04D3-458A-84C0-9DB1A4A8F735}"/>
               </a:ext>
             </a:extLst>
           </p:cNvPr>
@@ -9458,7 +9466,7 @@
           <p:cNvPr id="8" name="">
             <a:extLst xmlns:a="http://schemas.openxmlformats.org/drawingml/2006/main">
               <a:ext uri="{FF2B5EF4-FFF2-40B4-BE49-F238E27FC236}">
-                <a16:creationId xmlns:a16="http://schemas.microsoft.com/office/drawing/2014/main" id="{885218BC-3F01-4A0B-A34E-AA2FCE003641}"/>
+                <a16:creationId xmlns:a16="http://schemas.microsoft.com/office/drawing/2014/main" id="{7A564C9C-1494-47F0-9DD1-5458D6367780}"/>
               </a:ext>
             </a:extLst>
           </p:cNvPr>
@@ -9515,7 +9523,7 @@
           <p:cNvPr id="9" name="">
             <a:extLst xmlns:a="http://schemas.openxmlformats.org/drawingml/2006/main">
               <a:ext uri="{FF2B5EF4-FFF2-40B4-BE49-F238E27FC236}">
-                <a16:creationId xmlns:a16="http://schemas.microsoft.com/office/drawing/2014/main" id="{4791FF19-8A3A-4902-9553-FEC7E3540A02}"/>
+                <a16:creationId xmlns:a16="http://schemas.microsoft.com/office/drawing/2014/main" id="{4DEA81EC-2B9D-4E2C-897D-780E942985DA}"/>
               </a:ext>
             </a:extLst>
           </p:cNvPr>
@@ -9572,7 +9580,7 @@
           <p:cNvPr id="10" name="">
             <a:extLst xmlns:a="http://schemas.openxmlformats.org/drawingml/2006/main">
               <a:ext uri="{FF2B5EF4-FFF2-40B4-BE49-F238E27FC236}">
-                <a16:creationId xmlns:a16="http://schemas.microsoft.com/office/drawing/2014/main" id="{CF0C5D2A-27E0-4CA0-9AA0-40B3DBB8D4B4}"/>
+                <a16:creationId xmlns:a16="http://schemas.microsoft.com/office/drawing/2014/main" id="{17A0D291-CC51-4B78-9390-B84BF370039F}"/>
               </a:ext>
             </a:extLst>
           </p:cNvPr>
@@ -9629,7 +9637,7 @@
           <p:cNvPr id="11" name="">
             <a:extLst xmlns:a="http://schemas.openxmlformats.org/drawingml/2006/main">
               <a:ext uri="{FF2B5EF4-FFF2-40B4-BE49-F238E27FC236}">
-                <a16:creationId xmlns:a16="http://schemas.microsoft.com/office/drawing/2014/main" id="{2910AC1B-ADAD-4E8C-9E7B-B7A59E9B025A}"/>
+                <a16:creationId xmlns:a16="http://schemas.microsoft.com/office/drawing/2014/main" id="{C485ED01-0784-43E6-B851-E44AA611968E}"/>
               </a:ext>
             </a:extLst>
           </p:cNvPr>
@@ -9686,7 +9694,7 @@
           <p:cNvPr id="12" name="">
             <a:extLst xmlns:a="http://schemas.openxmlformats.org/drawingml/2006/main">
               <a:ext uri="{FF2B5EF4-FFF2-40B4-BE49-F238E27FC236}">
-                <a16:creationId xmlns:a16="http://schemas.microsoft.com/office/drawing/2014/main" id="{1528805E-8863-4C8C-87C8-3353543F69BB}"/>
+                <a16:creationId xmlns:a16="http://schemas.microsoft.com/office/drawing/2014/main" id="{AB643488-B8DA-4C30-9A2E-BDC1A36B9A9E}"/>
               </a:ext>
             </a:extLst>
           </p:cNvPr>
@@ -9718,7 +9726,7 @@
           <p:cNvPr id="13" name="">
             <a:extLst xmlns:a="http://schemas.openxmlformats.org/drawingml/2006/main">
               <a:ext uri="{FF2B5EF4-FFF2-40B4-BE49-F238E27FC236}">
-                <a16:creationId xmlns:a16="http://schemas.microsoft.com/office/drawing/2014/main" id="{C62723FE-CD57-45EA-A320-A346CFA80BF4}"/>
+                <a16:creationId xmlns:a16="http://schemas.microsoft.com/office/drawing/2014/main" id="{C3B8DD5F-5EA8-4BD8-8429-636C3DBB7638}"/>
               </a:ext>
             </a:extLst>
           </p:cNvPr>
@@ -9775,7 +9783,7 @@
           <p:cNvPr id="14" name="">
             <a:extLst xmlns:a="http://schemas.openxmlformats.org/drawingml/2006/main">
               <a:ext uri="{FF2B5EF4-FFF2-40B4-BE49-F238E27FC236}">
-                <a16:creationId xmlns:a16="http://schemas.microsoft.com/office/drawing/2014/main" id="{7FBA0EBC-3101-4152-A97E-28FF37311895}"/>
+                <a16:creationId xmlns:a16="http://schemas.microsoft.com/office/drawing/2014/main" id="{8DFCB0B2-9F66-41A4-B1A4-133D8DB9E626}"/>
               </a:ext>
             </a:extLst>
           </p:cNvPr>
@@ -9830,7 +9838,7 @@
     </p:spTree>
     <p:extLst>
       <p:ext uri="{BB962C8B-B14F-4D97-AF65-F5344CB8AC3E}">
-        <p14:creationId xmlns:p14="http://schemas.microsoft.com/office/powerpoint/2010/main" val="88178214"/>
+        <p14:creationId xmlns:p14="http://schemas.microsoft.com/office/powerpoint/2010/main" val="2075614179"/>
       </p:ext>
     </p:extLst>
   </p:cSld>
@@ -10031,7 +10039,7 @@
           <p:cNvPr id="16" name="">
             <a:extLst xmlns:a="http://schemas.openxmlformats.org/drawingml/2006/main">
               <a:ext uri="{FF2B5EF4-FFF2-40B4-BE49-F238E27FC236}">
-                <a16:creationId xmlns:a16="http://schemas.microsoft.com/office/drawing/2014/main" id="{BF9C786D-797D-428E-BAD2-292744757495}"/>
+                <a16:creationId xmlns:a16="http://schemas.microsoft.com/office/drawing/2014/main" id="{191EA78A-6253-4855-9D7A-461CB09A8D6F}"/>
               </a:ext>
             </a:extLst>
           </p:cNvPr>
@@ -10063,7 +10071,7 @@
           <p:cNvPr id="2" name="">
             <a:extLst xmlns:a="http://schemas.openxmlformats.org/drawingml/2006/main">
               <a:ext uri="{FF2B5EF4-FFF2-40B4-BE49-F238E27FC236}">
-                <a16:creationId xmlns:a16="http://schemas.microsoft.com/office/drawing/2014/main" id="{D863876E-5350-41E1-8B7D-55F1A8C518AD}"/>
+                <a16:creationId xmlns:a16="http://schemas.microsoft.com/office/drawing/2014/main" id="{4AA8C868-5F08-478E-9256-431D0ACE1712}"/>
               </a:ext>
             </a:extLst>
           </p:cNvPr>
@@ -10120,7 +10128,7 @@
           <p:cNvPr id="3" name="">
             <a:extLst xmlns:a="http://schemas.openxmlformats.org/drawingml/2006/main">
               <a:ext uri="{FF2B5EF4-FFF2-40B4-BE49-F238E27FC236}">
-                <a16:creationId xmlns:a16="http://schemas.microsoft.com/office/drawing/2014/main" id="{9574986A-1727-4CDD-BBB6-6136F59586E8}"/>
+                <a16:creationId xmlns:a16="http://schemas.microsoft.com/office/drawing/2014/main" id="{A1123646-4284-4F2F-8C69-EE620DB0D073}"/>
               </a:ext>
             </a:extLst>
           </p:cNvPr>
@@ -10152,7 +10160,7 @@
           <p:cNvPr id="4" name="">
             <a:extLst xmlns:a="http://schemas.openxmlformats.org/drawingml/2006/main">
               <a:ext uri="{FF2B5EF4-FFF2-40B4-BE49-F238E27FC236}">
-                <a16:creationId xmlns:a16="http://schemas.microsoft.com/office/drawing/2014/main" id="{46D1F37B-3DAE-4C90-808C-C082102AEA89}"/>
+                <a16:creationId xmlns:a16="http://schemas.microsoft.com/office/drawing/2014/main" id="{D7FEEADA-4432-4449-8E03-EAF3AAD305EC}"/>
               </a:ext>
             </a:extLst>
           </p:cNvPr>
@@ -10209,7 +10217,7 @@
           <p:cNvPr id="5" name="">
             <a:extLst xmlns:a="http://schemas.openxmlformats.org/drawingml/2006/main">
               <a:ext uri="{FF2B5EF4-FFF2-40B4-BE49-F238E27FC236}">
-                <a16:creationId xmlns:a16="http://schemas.microsoft.com/office/drawing/2014/main" id="{4E550B78-43EA-4E88-BDC1-4FC4FCE5F6D2}"/>
+                <a16:creationId xmlns:a16="http://schemas.microsoft.com/office/drawing/2014/main" id="{2872C511-9A74-4F5D-8160-DF839DD8091D}"/>
               </a:ext>
             </a:extLst>
           </p:cNvPr>
@@ -10266,7 +10274,7 @@
           <p:cNvPr id="6" name="">
             <a:extLst xmlns:a="http://schemas.openxmlformats.org/drawingml/2006/main">
               <a:ext uri="{FF2B5EF4-FFF2-40B4-BE49-F238E27FC236}">
-                <a16:creationId xmlns:a16="http://schemas.microsoft.com/office/drawing/2014/main" id="{FBFF9B7F-2A87-4987-9CA6-D378A8A44FDD}"/>
+                <a16:creationId xmlns:a16="http://schemas.microsoft.com/office/drawing/2014/main" id="{53261E28-F05B-463F-8A56-BAC7F411D7A7}"/>
               </a:ext>
             </a:extLst>
           </p:cNvPr>
@@ -10323,7 +10331,7 @@
           <p:cNvPr id="7" name="">
             <a:extLst xmlns:a="http://schemas.openxmlformats.org/drawingml/2006/main">
               <a:ext uri="{FF2B5EF4-FFF2-40B4-BE49-F238E27FC236}">
-                <a16:creationId xmlns:a16="http://schemas.microsoft.com/office/drawing/2014/main" id="{AAD62E1E-5C3B-4B7B-8B1F-D2989A78085F}"/>
+                <a16:creationId xmlns:a16="http://schemas.microsoft.com/office/drawing/2014/main" id="{F009D7CB-3B24-417C-A062-81A059F50FC4}"/>
               </a:ext>
             </a:extLst>
           </p:cNvPr>
@@ -10355,7 +10363,7 @@
           <p:cNvPr id="8" name="">
             <a:extLst xmlns:a="http://schemas.openxmlformats.org/drawingml/2006/main">
               <a:ext uri="{FF2B5EF4-FFF2-40B4-BE49-F238E27FC236}">
-                <a16:creationId xmlns:a16="http://schemas.microsoft.com/office/drawing/2014/main" id="{DDD9D87F-F875-43B6-A704-598986EED1F9}"/>
+                <a16:creationId xmlns:a16="http://schemas.microsoft.com/office/drawing/2014/main" id="{2FCBC13A-DACE-4F97-8EDC-5848A8AB8BFB}"/>
               </a:ext>
             </a:extLst>
           </p:cNvPr>
@@ -10412,7 +10420,7 @@
           <p:cNvPr id="9" name="">
             <a:extLst xmlns:a="http://schemas.openxmlformats.org/drawingml/2006/main">
               <a:ext uri="{FF2B5EF4-FFF2-40B4-BE49-F238E27FC236}">
-                <a16:creationId xmlns:a16="http://schemas.microsoft.com/office/drawing/2014/main" id="{7987F84C-FD03-490D-BBE7-67C6328C4CFF}"/>
+                <a16:creationId xmlns:a16="http://schemas.microsoft.com/office/drawing/2014/main" id="{F8C97A43-814E-41FC-AAEC-2BD3194F57BF}"/>
               </a:ext>
             </a:extLst>
           </p:cNvPr>
@@ -10469,7 +10477,7 @@
           <p:cNvPr id="10" name="">
             <a:extLst xmlns:a="http://schemas.openxmlformats.org/drawingml/2006/main">
               <a:ext uri="{FF2B5EF4-FFF2-40B4-BE49-F238E27FC236}">
-                <a16:creationId xmlns:a16="http://schemas.microsoft.com/office/drawing/2014/main" id="{7F69BCE7-5569-42BE-A50B-F2C1CC287DCE}"/>
+                <a16:creationId xmlns:a16="http://schemas.microsoft.com/office/drawing/2014/main" id="{7AE03F42-B310-41D8-B006-9344C2D04098}"/>
               </a:ext>
             </a:extLst>
           </p:cNvPr>
@@ -10526,7 +10534,7 @@
           <p:cNvPr id="11" name="">
             <a:extLst xmlns:a="http://schemas.openxmlformats.org/drawingml/2006/main">
               <a:ext uri="{FF2B5EF4-FFF2-40B4-BE49-F238E27FC236}">
-                <a16:creationId xmlns:a16="http://schemas.microsoft.com/office/drawing/2014/main" id="{FD53EFE8-9DB3-4FF1-B78D-0BC784A8E889}"/>
+                <a16:creationId xmlns:a16="http://schemas.microsoft.com/office/drawing/2014/main" id="{B1243E7B-7739-497E-A581-2F5E9F99E5F8}"/>
               </a:ext>
             </a:extLst>
           </p:cNvPr>
@@ -10583,7 +10591,7 @@
           <p:cNvPr id="12" name="">
             <a:extLst xmlns:a="http://schemas.openxmlformats.org/drawingml/2006/main">
               <a:ext uri="{FF2B5EF4-FFF2-40B4-BE49-F238E27FC236}">
-                <a16:creationId xmlns:a16="http://schemas.microsoft.com/office/drawing/2014/main" id="{14848C86-F606-489C-A6D8-5D539C562C4F}"/>
+                <a16:creationId xmlns:a16="http://schemas.microsoft.com/office/drawing/2014/main" id="{5C0C7B93-9A3F-495E-95A3-38A3B294F385}"/>
               </a:ext>
             </a:extLst>
           </p:cNvPr>
@@ -10640,7 +10648,7 @@
           <p:cNvPr id="13" name="">
             <a:extLst xmlns:a="http://schemas.openxmlformats.org/drawingml/2006/main">
               <a:ext uri="{FF2B5EF4-FFF2-40B4-BE49-F238E27FC236}">
-                <a16:creationId xmlns:a16="http://schemas.microsoft.com/office/drawing/2014/main" id="{7900A115-0761-4714-BE4E-D01404DD3939}"/>
+                <a16:creationId xmlns:a16="http://schemas.microsoft.com/office/drawing/2014/main" id="{ACB053C9-5F09-4932-980F-2E9B81C5A35A}"/>
               </a:ext>
             </a:extLst>
           </p:cNvPr>
@@ -10697,7 +10705,7 @@
           <p:cNvPr id="14" name="">
             <a:extLst xmlns:a="http://schemas.openxmlformats.org/drawingml/2006/main">
               <a:ext uri="{FF2B5EF4-FFF2-40B4-BE49-F238E27FC236}">
-                <a16:creationId xmlns:a16="http://schemas.microsoft.com/office/drawing/2014/main" id="{CEF48F9B-C2B1-4800-BB26-78A25932F0D2}"/>
+                <a16:creationId xmlns:a16="http://schemas.microsoft.com/office/drawing/2014/main" id="{90A68274-9E2C-4327-ABF8-24E9BC77E634}"/>
               </a:ext>
             </a:extLst>
           </p:cNvPr>
@@ -10754,7 +10762,7 @@
           <p:cNvPr id="15" name="">
             <a:extLst xmlns:a="http://schemas.openxmlformats.org/drawingml/2006/main">
               <a:ext uri="{FF2B5EF4-FFF2-40B4-BE49-F238E27FC236}">
-                <a16:creationId xmlns:a16="http://schemas.microsoft.com/office/drawing/2014/main" id="{E14F7DA0-E876-4E9B-9AC3-FD02AA64BD23}"/>
+                <a16:creationId xmlns:a16="http://schemas.microsoft.com/office/drawing/2014/main" id="{7CD3075D-C21F-4810-BD66-164C0634F657}"/>
               </a:ext>
             </a:extLst>
           </p:cNvPr>
@@ -10809,7 +10817,7 @@
     </p:spTree>
     <p:extLst>
       <p:ext uri="{BB962C8B-B14F-4D97-AF65-F5344CB8AC3E}">
-        <p14:creationId xmlns:p14="http://schemas.microsoft.com/office/powerpoint/2010/main" val="1820794477"/>
+        <p14:creationId xmlns:p14="http://schemas.microsoft.com/office/powerpoint/2010/main" val="779523160"/>
       </p:ext>
     </p:extLst>
   </p:cSld>
@@ -10964,7 +10972,7 @@
           <p:cNvPr id="16" name="">
             <a:extLst xmlns:a="http://schemas.openxmlformats.org/drawingml/2006/main">
               <a:ext uri="{FF2B5EF4-FFF2-40B4-BE49-F238E27FC236}">
-                <a16:creationId xmlns:a16="http://schemas.microsoft.com/office/drawing/2014/main" id="{DC82B2BB-6697-4844-B3CF-BCF0A42033E8}"/>
+                <a16:creationId xmlns:a16="http://schemas.microsoft.com/office/drawing/2014/main" id="{27975D26-F855-46C5-8F9F-D825B3E0739C}"/>
               </a:ext>
             </a:extLst>
           </p:cNvPr>
@@ -10996,7 +11004,7 @@
           <p:cNvPr id="2" name="">
             <a:extLst xmlns:a="http://schemas.openxmlformats.org/drawingml/2006/main">
               <a:ext uri="{FF2B5EF4-FFF2-40B4-BE49-F238E27FC236}">
-                <a16:creationId xmlns:a16="http://schemas.microsoft.com/office/drawing/2014/main" id="{EB1184E1-D229-406B-886D-CEF1C4A80A2F}"/>
+                <a16:creationId xmlns:a16="http://schemas.microsoft.com/office/drawing/2014/main" id="{C356E047-7F77-4031-802A-5A336712FF33}"/>
               </a:ext>
             </a:extLst>
           </p:cNvPr>
@@ -11053,7 +11061,7 @@
           <p:cNvPr id="3" name="">
             <a:extLst xmlns:a="http://schemas.openxmlformats.org/drawingml/2006/main">
               <a:ext uri="{FF2B5EF4-FFF2-40B4-BE49-F238E27FC236}">
-                <a16:creationId xmlns:a16="http://schemas.microsoft.com/office/drawing/2014/main" id="{A1E99970-4035-4C98-96D2-3A4344EED332}"/>
+                <a16:creationId xmlns:a16="http://schemas.microsoft.com/office/drawing/2014/main" id="{7F38492F-14C3-49B2-94AD-DF7BE418B76D}"/>
               </a:ext>
             </a:extLst>
           </p:cNvPr>
@@ -11085,7 +11093,7 @@
           <p:cNvPr id="4" name="">
             <a:extLst xmlns:a="http://schemas.openxmlformats.org/drawingml/2006/main">
               <a:ext uri="{FF2B5EF4-FFF2-40B4-BE49-F238E27FC236}">
-                <a16:creationId xmlns:a16="http://schemas.microsoft.com/office/drawing/2014/main" id="{5B54AF82-A963-446E-B292-0349685B9924}"/>
+                <a16:creationId xmlns:a16="http://schemas.microsoft.com/office/drawing/2014/main" id="{FDC26BA2-6C6E-4101-8A17-F2B2F59A03FA}"/>
               </a:ext>
             </a:extLst>
           </p:cNvPr>
@@ -11142,7 +11150,7 @@
           <p:cNvPr id="5" name="">
             <a:extLst xmlns:a="http://schemas.openxmlformats.org/drawingml/2006/main">
               <a:ext uri="{FF2B5EF4-FFF2-40B4-BE49-F238E27FC236}">
-                <a16:creationId xmlns:a16="http://schemas.microsoft.com/office/drawing/2014/main" id="{D38ED738-B9C6-4FBB-B832-BF7097B697CB}"/>
+                <a16:creationId xmlns:a16="http://schemas.microsoft.com/office/drawing/2014/main" id="{225899E4-3384-4695-A883-4BDD0F93C691}"/>
               </a:ext>
             </a:extLst>
           </p:cNvPr>
@@ -11199,7 +11207,7 @@
           <p:cNvPr id="6" name="">
             <a:extLst xmlns:a="http://schemas.openxmlformats.org/drawingml/2006/main">
               <a:ext uri="{FF2B5EF4-FFF2-40B4-BE49-F238E27FC236}">
-                <a16:creationId xmlns:a16="http://schemas.microsoft.com/office/drawing/2014/main" id="{84F91EC5-C7C3-4649-AB2F-E7A30053E19B}"/>
+                <a16:creationId xmlns:a16="http://schemas.microsoft.com/office/drawing/2014/main" id="{94DECA01-2ED3-40F5-BBF6-5C0F9374725B}"/>
               </a:ext>
             </a:extLst>
           </p:cNvPr>
@@ -11256,7 +11264,7 @@
           <p:cNvPr id="7" name="">
             <a:extLst xmlns:a="http://schemas.openxmlformats.org/drawingml/2006/main">
               <a:ext uri="{FF2B5EF4-FFF2-40B4-BE49-F238E27FC236}">
-                <a16:creationId xmlns:a16="http://schemas.microsoft.com/office/drawing/2014/main" id="{3FDC7169-1C7D-4034-BE86-29C66A6326D9}"/>
+                <a16:creationId xmlns:a16="http://schemas.microsoft.com/office/drawing/2014/main" id="{0AC7F1F5-522D-442C-AE8B-8BB670C0BBB1}"/>
               </a:ext>
             </a:extLst>
           </p:cNvPr>
@@ -11288,7 +11296,7 @@
           <p:cNvPr id="8" name="">
             <a:extLst xmlns:a="http://schemas.openxmlformats.org/drawingml/2006/main">
               <a:ext uri="{FF2B5EF4-FFF2-40B4-BE49-F238E27FC236}">
-                <a16:creationId xmlns:a16="http://schemas.microsoft.com/office/drawing/2014/main" id="{2FFD8EB3-D489-45F0-AFEB-DBE8392B4E3D}"/>
+                <a16:creationId xmlns:a16="http://schemas.microsoft.com/office/drawing/2014/main" id="{DB4FC45C-2570-4B6D-9A86-CAF62BF55E2B}"/>
               </a:ext>
             </a:extLst>
           </p:cNvPr>
@@ -11345,7 +11353,7 @@
           <p:cNvPr id="9" name="">
             <a:extLst xmlns:a="http://schemas.openxmlformats.org/drawingml/2006/main">
               <a:ext uri="{FF2B5EF4-FFF2-40B4-BE49-F238E27FC236}">
-                <a16:creationId xmlns:a16="http://schemas.microsoft.com/office/drawing/2014/main" id="{96E84861-4E22-4970-AC49-B2ABF5F7A633}"/>
+                <a16:creationId xmlns:a16="http://schemas.microsoft.com/office/drawing/2014/main" id="{8377A318-1E70-45A5-8134-7C4AE855CC4A}"/>
               </a:ext>
             </a:extLst>
           </p:cNvPr>
@@ -11406,7 +11414,7 @@
           <p:nvPr/>
         </p:nvPicPr>
         <p:blipFill>
-          <a:blip xmlns:r="http://schemas.openxmlformats.org/officeDocument/2006/relationships" xmlns:a="http://schemas.openxmlformats.org/drawingml/2006/main" r:embed="R77da5b71c5444556"/>
+          <a:blip xmlns:r="http://schemas.openxmlformats.org/officeDocument/2006/relationships" xmlns:a="http://schemas.openxmlformats.org/drawingml/2006/main" r:embed="R3efee31e03fa4e6c"/>
           <a:stretch xmlns:a="http://schemas.openxmlformats.org/drawingml/2006/main"/>
         </p:blipFill>
         <p:spPr>
@@ -11424,7 +11432,7 @@
           <p:cNvPr id="11" name="">
             <a:extLst xmlns:a="http://schemas.openxmlformats.org/drawingml/2006/main">
               <a:ext uri="{FF2B5EF4-FFF2-40B4-BE49-F238E27FC236}">
-                <a16:creationId xmlns:a16="http://schemas.microsoft.com/office/drawing/2014/main" id="{D0412D56-A136-42B5-BD90-73D455921A21}"/>
+                <a16:creationId xmlns:a16="http://schemas.microsoft.com/office/drawing/2014/main" id="{37D99D82-E44A-41A4-9569-586649570905}"/>
               </a:ext>
             </a:extLst>
           </p:cNvPr>
@@ -11481,7 +11489,7 @@
           <p:cNvPr id="12" name="">
             <a:extLst xmlns:a="http://schemas.openxmlformats.org/drawingml/2006/main">
               <a:ext uri="{FF2B5EF4-FFF2-40B4-BE49-F238E27FC236}">
-                <a16:creationId xmlns:a16="http://schemas.microsoft.com/office/drawing/2014/main" id="{9C52E032-E1CE-4052-BC92-9D1B434E37C5}"/>
+                <a16:creationId xmlns:a16="http://schemas.microsoft.com/office/drawing/2014/main" id="{EF17037F-AE90-4D54-B868-AE77B93F565D}"/>
               </a:ext>
             </a:extLst>
           </p:cNvPr>
@@ -11538,7 +11546,7 @@
           <p:cNvPr id="13" name="">
             <a:extLst xmlns:a="http://schemas.openxmlformats.org/drawingml/2006/main">
               <a:ext uri="{FF2B5EF4-FFF2-40B4-BE49-F238E27FC236}">
-                <a16:creationId xmlns:a16="http://schemas.microsoft.com/office/drawing/2014/main" id="{19BF076F-590D-409D-9081-A0EA676ECC31}"/>
+                <a16:creationId xmlns:a16="http://schemas.microsoft.com/office/drawing/2014/main" id="{9497157A-EE4C-49E8-9C02-331BF34DB2B9}"/>
               </a:ext>
             </a:extLst>
           </p:cNvPr>
@@ -11570,7 +11578,7 @@
           <p:cNvPr id="14" name="">
             <a:extLst xmlns:a="http://schemas.openxmlformats.org/drawingml/2006/main">
               <a:ext uri="{FF2B5EF4-FFF2-40B4-BE49-F238E27FC236}">
-                <a16:creationId xmlns:a16="http://schemas.microsoft.com/office/drawing/2014/main" id="{1E673693-B97F-42E7-980C-3B87526F410A}"/>
+                <a16:creationId xmlns:a16="http://schemas.microsoft.com/office/drawing/2014/main" id="{AF330E43-7A76-4CFF-8FC4-F12B03DED5E2}"/>
               </a:ext>
             </a:extLst>
           </p:cNvPr>
@@ -11627,7 +11635,7 @@
           <p:cNvPr id="15" name="">
             <a:extLst xmlns:a="http://schemas.openxmlformats.org/drawingml/2006/main">
               <a:ext uri="{FF2B5EF4-FFF2-40B4-BE49-F238E27FC236}">
-                <a16:creationId xmlns:a16="http://schemas.microsoft.com/office/drawing/2014/main" id="{83A69268-F01E-47C2-A3E5-8E34257562F5}"/>
+                <a16:creationId xmlns:a16="http://schemas.microsoft.com/office/drawing/2014/main" id="{B32FC5D0-DCCE-415B-8A9E-5CDE812CA40D}"/>
               </a:ext>
             </a:extLst>
           </p:cNvPr>
@@ -11682,7 +11690,7 @@
     </p:spTree>
     <p:extLst>
       <p:ext uri="{BB962C8B-B14F-4D97-AF65-F5344CB8AC3E}">
-        <p14:creationId xmlns:p14="http://schemas.microsoft.com/office/powerpoint/2010/main" val="348722169"/>
+        <p14:creationId xmlns:p14="http://schemas.microsoft.com/office/powerpoint/2010/main" val="537961451"/>
       </p:ext>
     </p:extLst>
   </p:cSld>
@@ -11837,7 +11845,7 @@
           <p:cNvPr id="23" name="">
             <a:extLst xmlns:a="http://schemas.openxmlformats.org/drawingml/2006/main">
               <a:ext uri="{FF2B5EF4-FFF2-40B4-BE49-F238E27FC236}">
-                <a16:creationId xmlns:a16="http://schemas.microsoft.com/office/drawing/2014/main" id="{3B7ADF67-AFD2-458A-A1BD-AA599A209AF7}"/>
+                <a16:creationId xmlns:a16="http://schemas.microsoft.com/office/drawing/2014/main" id="{47EB551F-1FDC-4319-A0E2-67ABFC99FABB}"/>
               </a:ext>
             </a:extLst>
           </p:cNvPr>
@@ -11869,7 +11877,7 @@
           <p:cNvPr id="2" name="">
             <a:extLst xmlns:a="http://schemas.openxmlformats.org/drawingml/2006/main">
               <a:ext uri="{FF2B5EF4-FFF2-40B4-BE49-F238E27FC236}">
-                <a16:creationId xmlns:a16="http://schemas.microsoft.com/office/drawing/2014/main" id="{7B9DC573-84DF-4BDC-ABDC-F0CE95122DD2}"/>
+                <a16:creationId xmlns:a16="http://schemas.microsoft.com/office/drawing/2014/main" id="{F2618544-5E13-446B-8E4B-F967FF462CE0}"/>
               </a:ext>
             </a:extLst>
           </p:cNvPr>
@@ -11926,7 +11934,7 @@
           <p:cNvPr id="3" name="">
             <a:extLst xmlns:a="http://schemas.openxmlformats.org/drawingml/2006/main">
               <a:ext uri="{FF2B5EF4-FFF2-40B4-BE49-F238E27FC236}">
-                <a16:creationId xmlns:a16="http://schemas.microsoft.com/office/drawing/2014/main" id="{6FA790B0-1352-43D0-A2B7-A340DF7EED9A}"/>
+                <a16:creationId xmlns:a16="http://schemas.microsoft.com/office/drawing/2014/main" id="{4AE4083E-3A9E-4D04-96D5-4DB6B5198EDD}"/>
               </a:ext>
             </a:extLst>
           </p:cNvPr>
@@ -11958,7 +11966,7 @@
           <p:cNvPr id="4" name="">
             <a:extLst xmlns:a="http://schemas.openxmlformats.org/drawingml/2006/main">
               <a:ext uri="{FF2B5EF4-FFF2-40B4-BE49-F238E27FC236}">
-                <a16:creationId xmlns:a16="http://schemas.microsoft.com/office/drawing/2014/main" id="{20BD949E-FECA-45AD-B0D0-DFC0FF13D1A8}"/>
+                <a16:creationId xmlns:a16="http://schemas.microsoft.com/office/drawing/2014/main" id="{4B8AEDF8-D156-4A69-8A57-9D932CCDB39C}"/>
               </a:ext>
             </a:extLst>
           </p:cNvPr>
@@ -12015,7 +12023,7 @@
           <p:cNvPr id="5" name="">
             <a:extLst xmlns:a="http://schemas.openxmlformats.org/drawingml/2006/main">
               <a:ext uri="{FF2B5EF4-FFF2-40B4-BE49-F238E27FC236}">
-                <a16:creationId xmlns:a16="http://schemas.microsoft.com/office/drawing/2014/main" id="{E95C0F19-B662-43F1-9696-2EDBCC7BA5D8}"/>
+                <a16:creationId xmlns:a16="http://schemas.microsoft.com/office/drawing/2014/main" id="{99E46FE9-9F84-4248-A156-0F461981C918}"/>
               </a:ext>
             </a:extLst>
           </p:cNvPr>
@@ -12072,7 +12080,7 @@
           <p:cNvPr id="6" name="">
             <a:extLst xmlns:a="http://schemas.openxmlformats.org/drawingml/2006/main">
               <a:ext uri="{FF2B5EF4-FFF2-40B4-BE49-F238E27FC236}">
-                <a16:creationId xmlns:a16="http://schemas.microsoft.com/office/drawing/2014/main" id="{A2FE5840-9FF7-4BCE-9719-94E1F719D586}"/>
+                <a16:creationId xmlns:a16="http://schemas.microsoft.com/office/drawing/2014/main" id="{F2D43804-D208-4993-A25D-58EBAF8DE353}"/>
               </a:ext>
             </a:extLst>
           </p:cNvPr>
@@ -12129,7 +12137,7 @@
           <p:cNvPr id="7" name="">
             <a:extLst xmlns:a="http://schemas.openxmlformats.org/drawingml/2006/main">
               <a:ext uri="{FF2B5EF4-FFF2-40B4-BE49-F238E27FC236}">
-                <a16:creationId xmlns:a16="http://schemas.microsoft.com/office/drawing/2014/main" id="{72C50BD0-0222-4B5F-84E5-1921D5A02C3F}"/>
+                <a16:creationId xmlns:a16="http://schemas.microsoft.com/office/drawing/2014/main" id="{F641F12C-D77D-40AB-8CCB-81801CC2DF06}"/>
               </a:ext>
             </a:extLst>
           </p:cNvPr>
@@ -12161,7 +12169,7 @@
           <p:cNvPr id="8" name="">
             <a:extLst xmlns:a="http://schemas.openxmlformats.org/drawingml/2006/main">
               <a:ext uri="{FF2B5EF4-FFF2-40B4-BE49-F238E27FC236}">
-                <a16:creationId xmlns:a16="http://schemas.microsoft.com/office/drawing/2014/main" id="{F9B339D0-9753-4390-B63B-72C933FAFF39}"/>
+                <a16:creationId xmlns:a16="http://schemas.microsoft.com/office/drawing/2014/main" id="{16104390-8C69-4C1C-AF19-7354ABEE9E50}"/>
               </a:ext>
             </a:extLst>
           </p:cNvPr>
@@ -12218,7 +12226,7 @@
           <p:cNvPr id="9" name="">
             <a:extLst xmlns:a="http://schemas.openxmlformats.org/drawingml/2006/main">
               <a:ext uri="{FF2B5EF4-FFF2-40B4-BE49-F238E27FC236}">
-                <a16:creationId xmlns:a16="http://schemas.microsoft.com/office/drawing/2014/main" id="{0C1EE312-F664-4FE0-9478-24F9E6CBDA3E}"/>
+                <a16:creationId xmlns:a16="http://schemas.microsoft.com/office/drawing/2014/main" id="{584164E1-1DDA-4D8D-8E52-CB9AB5FDA380}"/>
               </a:ext>
             </a:extLst>
           </p:cNvPr>
@@ -12275,7 +12283,7 @@
           <p:cNvPr id="10" name="">
             <a:extLst xmlns:a="http://schemas.openxmlformats.org/drawingml/2006/main">
               <a:ext uri="{FF2B5EF4-FFF2-40B4-BE49-F238E27FC236}">
-                <a16:creationId xmlns:a16="http://schemas.microsoft.com/office/drawing/2014/main" id="{827D0BB9-4254-4926-ABEC-FB94FED78EA8}"/>
+                <a16:creationId xmlns:a16="http://schemas.microsoft.com/office/drawing/2014/main" id="{A6B09D6E-DF73-4ADD-ABE8-259B50DF088D}"/>
               </a:ext>
             </a:extLst>
           </p:cNvPr>
@@ -12309,7 +12317,7 @@
           <p:cNvPr id="11" name="">
             <a:extLst xmlns:a="http://schemas.openxmlformats.org/drawingml/2006/main">
               <a:ext uri="{FF2B5EF4-FFF2-40B4-BE49-F238E27FC236}">
-                <a16:creationId xmlns:a16="http://schemas.microsoft.com/office/drawing/2014/main" id="{FB9FD803-6556-4970-BF36-3747324EC490}"/>
+                <a16:creationId xmlns:a16="http://schemas.microsoft.com/office/drawing/2014/main" id="{6C78CB8F-0950-44BD-ACD4-DB753B8D055A}"/>
               </a:ext>
             </a:extLst>
           </p:cNvPr>
@@ -12341,7 +12349,7 @@
           <p:cNvPr id="12" name="">
             <a:extLst xmlns:a="http://schemas.openxmlformats.org/drawingml/2006/main">
               <a:ext uri="{FF2B5EF4-FFF2-40B4-BE49-F238E27FC236}">
-                <a16:creationId xmlns:a16="http://schemas.microsoft.com/office/drawing/2014/main" id="{CFAC1FE1-09D1-4900-85CD-3C17BDE31290}"/>
+                <a16:creationId xmlns:a16="http://schemas.microsoft.com/office/drawing/2014/main" id="{50844838-F780-4ADD-84A2-AA403A072AF4}"/>
               </a:ext>
             </a:extLst>
           </p:cNvPr>
@@ -12398,7 +12406,7 @@
           <p:cNvPr id="13" name="">
             <a:extLst xmlns:a="http://schemas.openxmlformats.org/drawingml/2006/main">
               <a:ext uri="{FF2B5EF4-FFF2-40B4-BE49-F238E27FC236}">
-                <a16:creationId xmlns:a16="http://schemas.microsoft.com/office/drawing/2014/main" id="{31A84905-3BE8-4D39-9141-40EA53671C2F}"/>
+                <a16:creationId xmlns:a16="http://schemas.microsoft.com/office/drawing/2014/main" id="{8B21ACAB-0C20-4C77-BC75-8AA4B29514B3}"/>
               </a:ext>
             </a:extLst>
           </p:cNvPr>
@@ -12455,7 +12463,7 @@
           <p:cNvPr id="14" name="">
             <a:extLst xmlns:a="http://schemas.openxmlformats.org/drawingml/2006/main">
               <a:ext uri="{FF2B5EF4-FFF2-40B4-BE49-F238E27FC236}">
-                <a16:creationId xmlns:a16="http://schemas.microsoft.com/office/drawing/2014/main" id="{7C6E3A29-BAEC-47E5-8534-056B5217B3FE}"/>
+                <a16:creationId xmlns:a16="http://schemas.microsoft.com/office/drawing/2014/main" id="{0DB742A2-D8B6-47EE-8A06-E75551F9FFC1}"/>
               </a:ext>
             </a:extLst>
           </p:cNvPr>
@@ -12489,7 +12497,7 @@
           <p:cNvPr id="15" name="">
             <a:extLst xmlns:a="http://schemas.openxmlformats.org/drawingml/2006/main">
               <a:ext uri="{FF2B5EF4-FFF2-40B4-BE49-F238E27FC236}">
-                <a16:creationId xmlns:a16="http://schemas.microsoft.com/office/drawing/2014/main" id="{7B295107-AF9E-4B16-9A61-FA27975AF201}"/>
+                <a16:creationId xmlns:a16="http://schemas.microsoft.com/office/drawing/2014/main" id="{B73D0E9A-C76E-4909-A288-E1CD2129C398}"/>
               </a:ext>
             </a:extLst>
           </p:cNvPr>
@@ -12521,7 +12529,7 @@
           <p:cNvPr id="16" name="">
             <a:extLst xmlns:a="http://schemas.openxmlformats.org/drawingml/2006/main">
               <a:ext uri="{FF2B5EF4-FFF2-40B4-BE49-F238E27FC236}">
-                <a16:creationId xmlns:a16="http://schemas.microsoft.com/office/drawing/2014/main" id="{491E0459-2E06-4F09-82E5-7CF89B16CC21}"/>
+                <a16:creationId xmlns:a16="http://schemas.microsoft.com/office/drawing/2014/main" id="{63D7C4AC-99D1-44EB-B201-CED6C0D0EDEC}"/>
               </a:ext>
             </a:extLst>
           </p:cNvPr>
@@ -12578,7 +12586,7 @@
           <p:cNvPr id="17" name="">
             <a:extLst xmlns:a="http://schemas.openxmlformats.org/drawingml/2006/main">
               <a:ext uri="{FF2B5EF4-FFF2-40B4-BE49-F238E27FC236}">
-                <a16:creationId xmlns:a16="http://schemas.microsoft.com/office/drawing/2014/main" id="{1DCCE692-97BF-4A1F-87BD-3C96E4871AC5}"/>
+                <a16:creationId xmlns:a16="http://schemas.microsoft.com/office/drawing/2014/main" id="{05BA95DA-7B7D-4739-BB6F-F8DBA0440720}"/>
               </a:ext>
             </a:extLst>
           </p:cNvPr>
@@ -12635,7 +12643,7 @@
           <p:cNvPr id="18" name="">
             <a:extLst xmlns:a="http://schemas.openxmlformats.org/drawingml/2006/main">
               <a:ext uri="{FF2B5EF4-FFF2-40B4-BE49-F238E27FC236}">
-                <a16:creationId xmlns:a16="http://schemas.microsoft.com/office/drawing/2014/main" id="{8D9B166F-5CFF-4B8C-80E9-B73646A3578F}"/>
+                <a16:creationId xmlns:a16="http://schemas.microsoft.com/office/drawing/2014/main" id="{5E4915FE-8C69-4304-B75A-7ABE9517A054}"/>
               </a:ext>
             </a:extLst>
           </p:cNvPr>
@@ -12669,7 +12677,7 @@
           <p:cNvPr id="19" name="">
             <a:extLst xmlns:a="http://schemas.openxmlformats.org/drawingml/2006/main">
               <a:ext uri="{FF2B5EF4-FFF2-40B4-BE49-F238E27FC236}">
-                <a16:creationId xmlns:a16="http://schemas.microsoft.com/office/drawing/2014/main" id="{9ABB47C2-1476-4FAF-AC2D-A4DFCD79E322}"/>
+                <a16:creationId xmlns:a16="http://schemas.microsoft.com/office/drawing/2014/main" id="{5B08EEC9-7A2B-4842-883C-78C6CA7C5D11}"/>
               </a:ext>
             </a:extLst>
           </p:cNvPr>
@@ -12701,7 +12709,7 @@
           <p:cNvPr id="20" name="">
             <a:extLst xmlns:a="http://schemas.openxmlformats.org/drawingml/2006/main">
               <a:ext uri="{FF2B5EF4-FFF2-40B4-BE49-F238E27FC236}">
-                <a16:creationId xmlns:a16="http://schemas.microsoft.com/office/drawing/2014/main" id="{3D3932FC-53CF-498F-B92D-668C39D03708}"/>
+                <a16:creationId xmlns:a16="http://schemas.microsoft.com/office/drawing/2014/main" id="{8B34B84A-798B-4B08-8064-2CDF5289006F}"/>
               </a:ext>
             </a:extLst>
           </p:cNvPr>
@@ -12758,7 +12766,7 @@
           <p:cNvPr id="21" name="">
             <a:extLst xmlns:a="http://schemas.openxmlformats.org/drawingml/2006/main">
               <a:ext uri="{FF2B5EF4-FFF2-40B4-BE49-F238E27FC236}">
-                <a16:creationId xmlns:a16="http://schemas.microsoft.com/office/drawing/2014/main" id="{CF850D0F-4F40-4ACC-BF81-8B8316A4F607}"/>
+                <a16:creationId xmlns:a16="http://schemas.microsoft.com/office/drawing/2014/main" id="{2B73212D-37BC-4804-8720-C277B106B958}"/>
               </a:ext>
             </a:extLst>
           </p:cNvPr>
@@ -12815,7 +12823,7 @@
           <p:cNvPr id="22" name="">
             <a:extLst xmlns:a="http://schemas.openxmlformats.org/drawingml/2006/main">
               <a:ext uri="{FF2B5EF4-FFF2-40B4-BE49-F238E27FC236}">
-                <a16:creationId xmlns:a16="http://schemas.microsoft.com/office/drawing/2014/main" id="{23566B16-DA96-4AB0-A3EB-D3C37C34DC3C}"/>
+                <a16:creationId xmlns:a16="http://schemas.microsoft.com/office/drawing/2014/main" id="{DF380DDD-25FC-4ADE-9F74-2B1CBA138FCE}"/>
               </a:ext>
             </a:extLst>
           </p:cNvPr>
@@ -12870,7 +12878,7 @@
     </p:spTree>
     <p:extLst>
       <p:ext uri="{BB962C8B-B14F-4D97-AF65-F5344CB8AC3E}">
-        <p14:creationId xmlns:p14="http://schemas.microsoft.com/office/powerpoint/2010/main" val="356932313"/>
+        <p14:creationId xmlns:p14="http://schemas.microsoft.com/office/powerpoint/2010/main" val="426052909"/>
       </p:ext>
     </p:extLst>
   </p:cSld>
@@ -13071,7 +13079,7 @@
           <p:cNvPr id="22" name="">
             <a:extLst xmlns:a="http://schemas.openxmlformats.org/drawingml/2006/main">
               <a:ext uri="{FF2B5EF4-FFF2-40B4-BE49-F238E27FC236}">
-                <a16:creationId xmlns:a16="http://schemas.microsoft.com/office/drawing/2014/main" id="{50C27F45-A5DF-4EFB-BC17-04191D6BFB7D}"/>
+                <a16:creationId xmlns:a16="http://schemas.microsoft.com/office/drawing/2014/main" id="{3183AEC7-5901-4061-8595-6CD7F99B2B44}"/>
               </a:ext>
             </a:extLst>
           </p:cNvPr>
@@ -13103,7 +13111,7 @@
           <p:cNvPr id="2" name="">
             <a:extLst xmlns:a="http://schemas.openxmlformats.org/drawingml/2006/main">
               <a:ext uri="{FF2B5EF4-FFF2-40B4-BE49-F238E27FC236}">
-                <a16:creationId xmlns:a16="http://schemas.microsoft.com/office/drawing/2014/main" id="{AC782B5E-42C7-4585-AFE0-20B76A72C355}"/>
+                <a16:creationId xmlns:a16="http://schemas.microsoft.com/office/drawing/2014/main" id="{C4B027F5-9D6D-4305-887D-16C52A1C6D1A}"/>
               </a:ext>
             </a:extLst>
           </p:cNvPr>
@@ -13160,7 +13168,7 @@
           <p:cNvPr id="3" name="">
             <a:extLst xmlns:a="http://schemas.openxmlformats.org/drawingml/2006/main">
               <a:ext uri="{FF2B5EF4-FFF2-40B4-BE49-F238E27FC236}">
-                <a16:creationId xmlns:a16="http://schemas.microsoft.com/office/drawing/2014/main" id="{D346806F-96F4-4EAA-9024-B13457EBF1BC}"/>
+                <a16:creationId xmlns:a16="http://schemas.microsoft.com/office/drawing/2014/main" id="{BB96EFEB-78B4-4948-8AFB-EF2F1866B8AB}"/>
               </a:ext>
             </a:extLst>
           </p:cNvPr>
@@ -13192,7 +13200,7 @@
           <p:cNvPr id="4" name="">
             <a:extLst xmlns:a="http://schemas.openxmlformats.org/drawingml/2006/main">
               <a:ext uri="{FF2B5EF4-FFF2-40B4-BE49-F238E27FC236}">
-                <a16:creationId xmlns:a16="http://schemas.microsoft.com/office/drawing/2014/main" id="{587CEF75-1C32-4AA0-B716-C0D9ED075FE5}"/>
+                <a16:creationId xmlns:a16="http://schemas.microsoft.com/office/drawing/2014/main" id="{3905598C-4A60-4C74-9AEA-94BE3A69C9F0}"/>
               </a:ext>
             </a:extLst>
           </p:cNvPr>
@@ -13249,7 +13257,7 @@
           <p:cNvPr id="5" name="">
             <a:extLst xmlns:a="http://schemas.openxmlformats.org/drawingml/2006/main">
               <a:ext uri="{FF2B5EF4-FFF2-40B4-BE49-F238E27FC236}">
-                <a16:creationId xmlns:a16="http://schemas.microsoft.com/office/drawing/2014/main" id="{F513853E-78F4-46C0-9256-C0E8FF230247}"/>
+                <a16:creationId xmlns:a16="http://schemas.microsoft.com/office/drawing/2014/main" id="{63AD8D26-82F7-480F-AF76-4BFE261A19DF}"/>
               </a:ext>
             </a:extLst>
           </p:cNvPr>
@@ -13306,7 +13314,7 @@
           <p:cNvPr id="6" name="">
             <a:extLst xmlns:a="http://schemas.openxmlformats.org/drawingml/2006/main">
               <a:ext uri="{FF2B5EF4-FFF2-40B4-BE49-F238E27FC236}">
-                <a16:creationId xmlns:a16="http://schemas.microsoft.com/office/drawing/2014/main" id="{7444B0EE-E43F-4973-8445-91CA7FA2226F}"/>
+                <a16:creationId xmlns:a16="http://schemas.microsoft.com/office/drawing/2014/main" id="{DB7A62E3-BC6F-455D-9F51-C5710E6ED021}"/>
               </a:ext>
             </a:extLst>
           </p:cNvPr>
@@ -13363,7 +13371,7 @@
           <p:cNvPr id="7" name="">
             <a:extLst xmlns:a="http://schemas.openxmlformats.org/drawingml/2006/main">
               <a:ext uri="{FF2B5EF4-FFF2-40B4-BE49-F238E27FC236}">
-                <a16:creationId xmlns:a16="http://schemas.microsoft.com/office/drawing/2014/main" id="{7ED34A02-9306-482F-A499-73696569A9C9}"/>
+                <a16:creationId xmlns:a16="http://schemas.microsoft.com/office/drawing/2014/main" id="{84531645-19DD-4DEB-9E55-BCDB54996E96}"/>
               </a:ext>
             </a:extLst>
           </p:cNvPr>
@@ -13395,7 +13403,7 @@
           <p:cNvPr id="8" name="">
             <a:extLst xmlns:a="http://schemas.openxmlformats.org/drawingml/2006/main">
               <a:ext uri="{FF2B5EF4-FFF2-40B4-BE49-F238E27FC236}">
-                <a16:creationId xmlns:a16="http://schemas.microsoft.com/office/drawing/2014/main" id="{D2B88A0A-46EB-4A0E-9FEA-AB521949AE2B}"/>
+                <a16:creationId xmlns:a16="http://schemas.microsoft.com/office/drawing/2014/main" id="{BBD12C5E-379F-42EA-9E46-40E7D28FE674}"/>
               </a:ext>
             </a:extLst>
           </p:cNvPr>
@@ -13452,7 +13460,7 @@
           <p:cNvPr id="9" name="">
             <a:extLst xmlns:a="http://schemas.openxmlformats.org/drawingml/2006/main">
               <a:ext uri="{FF2B5EF4-FFF2-40B4-BE49-F238E27FC236}">
-                <a16:creationId xmlns:a16="http://schemas.microsoft.com/office/drawing/2014/main" id="{C07AAC97-56AF-42B9-9986-C1A1B1036321}"/>
+                <a16:creationId xmlns:a16="http://schemas.microsoft.com/office/drawing/2014/main" id="{A8C44633-A763-4AA1-9268-F860244C7FA6}"/>
               </a:ext>
             </a:extLst>
           </p:cNvPr>
@@ -13509,7 +13517,7 @@
           <p:cNvPr id="10" name="">
             <a:extLst xmlns:a="http://schemas.openxmlformats.org/drawingml/2006/main">
               <a:ext uri="{FF2B5EF4-FFF2-40B4-BE49-F238E27FC236}">
-                <a16:creationId xmlns:a16="http://schemas.microsoft.com/office/drawing/2014/main" id="{9BE9F481-FE1F-4C87-ACFF-AB816A91AD5B}"/>
+                <a16:creationId xmlns:a16="http://schemas.microsoft.com/office/drawing/2014/main" id="{D0F0AA75-7261-4B0A-880F-2992517A61DA}"/>
               </a:ext>
             </a:extLst>
           </p:cNvPr>
@@ -13543,7 +13551,7 @@
           <p:cNvPr id="11" name="">
             <a:extLst xmlns:a="http://schemas.openxmlformats.org/drawingml/2006/main">
               <a:ext uri="{FF2B5EF4-FFF2-40B4-BE49-F238E27FC236}">
-                <a16:creationId xmlns:a16="http://schemas.microsoft.com/office/drawing/2014/main" id="{26DD1BC7-31D9-4A74-8E29-8E25F6358137}"/>
+                <a16:creationId xmlns:a16="http://schemas.microsoft.com/office/drawing/2014/main" id="{80704D19-0818-4D5F-986A-F45A96AC0F47}"/>
               </a:ext>
             </a:extLst>
           </p:cNvPr>
@@ -13575,7 +13583,7 @@
           <p:cNvPr id="12" name="">
             <a:extLst xmlns:a="http://schemas.openxmlformats.org/drawingml/2006/main">
               <a:ext uri="{FF2B5EF4-FFF2-40B4-BE49-F238E27FC236}">
-                <a16:creationId xmlns:a16="http://schemas.microsoft.com/office/drawing/2014/main" id="{25A380A7-EB09-41A4-99C9-5697B10C2F13}"/>
+                <a16:creationId xmlns:a16="http://schemas.microsoft.com/office/drawing/2014/main" id="{CEA66DBD-D64B-4976-B9C3-49AF5D45C901}"/>
               </a:ext>
             </a:extLst>
           </p:cNvPr>
@@ -13632,7 +13640,7 @@
           <p:cNvPr id="13" name="">
             <a:extLst xmlns:a="http://schemas.openxmlformats.org/drawingml/2006/main">
               <a:ext uri="{FF2B5EF4-FFF2-40B4-BE49-F238E27FC236}">
-                <a16:creationId xmlns:a16="http://schemas.microsoft.com/office/drawing/2014/main" id="{E4E532C2-F385-4FBD-8D14-6AA48F38CF57}"/>
+                <a16:creationId xmlns:a16="http://schemas.microsoft.com/office/drawing/2014/main" id="{D5FE086B-6A23-439C-A9D9-9566B6D8864E}"/>
               </a:ext>
             </a:extLst>
           </p:cNvPr>
@@ -13689,7 +13697,7 @@
           <p:cNvPr id="14" name="">
             <a:extLst xmlns:a="http://schemas.openxmlformats.org/drawingml/2006/main">
               <a:ext uri="{FF2B5EF4-FFF2-40B4-BE49-F238E27FC236}">
-                <a16:creationId xmlns:a16="http://schemas.microsoft.com/office/drawing/2014/main" id="{10158AEC-2422-4C1C-824C-18B3AD3BA03F}"/>
+                <a16:creationId xmlns:a16="http://schemas.microsoft.com/office/drawing/2014/main" id="{0E10DDEE-6216-43AD-99A0-3CD049831DAD}"/>
               </a:ext>
             </a:extLst>
           </p:cNvPr>
@@ -13723,7 +13731,7 @@
           <p:cNvPr id="15" name="">
             <a:extLst xmlns:a="http://schemas.openxmlformats.org/drawingml/2006/main">
               <a:ext uri="{FF2B5EF4-FFF2-40B4-BE49-F238E27FC236}">
-                <a16:creationId xmlns:a16="http://schemas.microsoft.com/office/drawing/2014/main" id="{8A5FBB52-0364-45A1-B98D-7F8E9F160570}"/>
+                <a16:creationId xmlns:a16="http://schemas.microsoft.com/office/drawing/2014/main" id="{D4A35149-3DB1-4D0C-A0E3-E02A957D1FAE}"/>
               </a:ext>
             </a:extLst>
           </p:cNvPr>
@@ -13755,7 +13763,7 @@
           <p:cNvPr id="16" name="">
             <a:extLst xmlns:a="http://schemas.openxmlformats.org/drawingml/2006/main">
               <a:ext uri="{FF2B5EF4-FFF2-40B4-BE49-F238E27FC236}">
-                <a16:creationId xmlns:a16="http://schemas.microsoft.com/office/drawing/2014/main" id="{22D557C9-A768-4723-B287-2BEC6F81F7E5}"/>
+                <a16:creationId xmlns:a16="http://schemas.microsoft.com/office/drawing/2014/main" id="{AC553FE3-71B4-4315-8B41-20F08336E629}"/>
               </a:ext>
             </a:extLst>
           </p:cNvPr>
@@ -13812,7 +13820,7 @@
           <p:cNvPr id="17" name="">
             <a:extLst xmlns:a="http://schemas.openxmlformats.org/drawingml/2006/main">
               <a:ext uri="{FF2B5EF4-FFF2-40B4-BE49-F238E27FC236}">
-                <a16:creationId xmlns:a16="http://schemas.microsoft.com/office/drawing/2014/main" id="{49C3936C-BE44-4731-8270-1733E2DD5A37}"/>
+                <a16:creationId xmlns:a16="http://schemas.microsoft.com/office/drawing/2014/main" id="{377D170C-A8B7-46D0-9DD7-CCEA063C4FF7}"/>
               </a:ext>
             </a:extLst>
           </p:cNvPr>
@@ -13869,7 +13877,7 @@
           <p:cNvPr id="18" name="">
             <a:extLst xmlns:a="http://schemas.openxmlformats.org/drawingml/2006/main">
               <a:ext uri="{FF2B5EF4-FFF2-40B4-BE49-F238E27FC236}">
-                <a16:creationId xmlns:a16="http://schemas.microsoft.com/office/drawing/2014/main" id="{E9F08496-A013-40C2-988E-A1CD981DC4C8}"/>
+                <a16:creationId xmlns:a16="http://schemas.microsoft.com/office/drawing/2014/main" id="{2F283ACB-EC7C-4F67-A2C6-513B35F2257C}"/>
               </a:ext>
             </a:extLst>
           </p:cNvPr>
@@ -13903,7 +13911,7 @@
           <p:cNvPr id="19" name="">
             <a:extLst xmlns:a="http://schemas.openxmlformats.org/drawingml/2006/main">
               <a:ext uri="{FF2B5EF4-FFF2-40B4-BE49-F238E27FC236}">
-                <a16:creationId xmlns:a16="http://schemas.microsoft.com/office/drawing/2014/main" id="{A0B79107-A106-4A5B-A1C0-18F47055EFC2}"/>
+                <a16:creationId xmlns:a16="http://schemas.microsoft.com/office/drawing/2014/main" id="{5C5671DE-1FF9-4DE3-AEEF-967771AE9F21}"/>
               </a:ext>
             </a:extLst>
           </p:cNvPr>
@@ -13935,7 +13943,7 @@
           <p:cNvPr id="20" name="">
             <a:extLst xmlns:a="http://schemas.openxmlformats.org/drawingml/2006/main">
               <a:ext uri="{FF2B5EF4-FFF2-40B4-BE49-F238E27FC236}">
-                <a16:creationId xmlns:a16="http://schemas.microsoft.com/office/drawing/2014/main" id="{D68CF178-E88D-44F7-B2DB-A5E0BC1EA8B5}"/>
+                <a16:creationId xmlns:a16="http://schemas.microsoft.com/office/drawing/2014/main" id="{601C31D6-9504-491F-AA4B-E406A86C866B}"/>
               </a:ext>
             </a:extLst>
           </p:cNvPr>
@@ -13992,7 +14000,7 @@
           <p:cNvPr id="21" name="">
             <a:extLst xmlns:a="http://schemas.openxmlformats.org/drawingml/2006/main">
               <a:ext uri="{FF2B5EF4-FFF2-40B4-BE49-F238E27FC236}">
-                <a16:creationId xmlns:a16="http://schemas.microsoft.com/office/drawing/2014/main" id="{479671A1-D4EC-42D2-8190-DE9C94FA6AFD}"/>
+                <a16:creationId xmlns:a16="http://schemas.microsoft.com/office/drawing/2014/main" id="{442A6CB0-6EBE-4A83-875A-442B129806AB}"/>
               </a:ext>
             </a:extLst>
           </p:cNvPr>
@@ -14047,7 +14055,7 @@
     </p:spTree>
     <p:extLst>
       <p:ext uri="{BB962C8B-B14F-4D97-AF65-F5344CB8AC3E}">
-        <p14:creationId xmlns:p14="http://schemas.microsoft.com/office/powerpoint/2010/main" val="293230113"/>
+        <p14:creationId xmlns:p14="http://schemas.microsoft.com/office/powerpoint/2010/main" val="2123798158"/>
       </p:ext>
     </p:extLst>
   </p:cSld>
